--- a/examples/preview/subjects/语文.pptx
+++ b/examples/preview/subjects/语文.pptx
@@ -3115,7 +3115,7 @@
             <a:avLst/>
           </a:prstGeom>
           <a:solidFill>
-            <a:srgbClr val="FBF7F0"/>
+            <a:srgbClr val="FBF8F2"/>
           </a:solidFill>
           <a:ln>
             <a:noFill/>
@@ -3153,13 +3153,13 @@
         <p:spPr>
           <a:xfrm>
             <a:off x="0" y="0"/>
-            <a:ext cx="12191695" cy="82296"/>
+            <a:ext cx="12191695" cy="457200"/>
           </a:xfrm>
           <a:prstGeom prst="rect">
             <a:avLst/>
           </a:prstGeom>
           <a:solidFill>
-            <a:srgbClr val="1C1B19"/>
+            <a:srgbClr val="F7F2E8"/>
           </a:solidFill>
           <a:ln>
             <a:noFill/>
@@ -3196,14 +3196,14 @@
         </p:nvSpPr>
         <p:spPr>
           <a:xfrm>
-            <a:off x="0" y="6775704"/>
-            <a:ext cx="12191695" cy="82296"/>
+            <a:off x="0" y="457200"/>
+            <a:ext cx="12191695" cy="12700"/>
           </a:xfrm>
           <a:prstGeom prst="rect">
             <a:avLst/>
           </a:prstGeom>
           <a:solidFill>
-            <a:srgbClr val="A6322A"/>
+            <a:srgbClr val="9F5647"/>
           </a:solidFill>
           <a:ln>
             <a:noFill/>
@@ -3240,8 +3240,8 @@
         </p:nvSpPr>
         <p:spPr>
           <a:xfrm>
-            <a:off x="10225735" y="960120"/>
-            <a:ext cx="1371600" cy="4754880"/>
+            <a:off x="566928" y="73152"/>
+            <a:ext cx="11057839" cy="329184"/>
           </a:xfrm>
           <a:prstGeom prst="rect">
             <a:avLst/>
@@ -3249,26 +3249,36 @@
           <a:noFill/>
         </p:spPr>
         <p:txBody>
-          <a:bodyPr wrap="none" anchor="t" lIns="54864" rIns="54864" tIns="0" bIns="0" vert="eaVert">
+          <a:bodyPr wrap="square" anchor="t" lIns="54864" rIns="54864" tIns="0" bIns="0">
             <a:spAutoFit/>
           </a:bodyPr>
           <a:lstStyle/>
           <a:p>
-            <a:pPr algn="ctr">
+            <a:pPr algn="l">
               <a:lnSpc>
-                <a:spcPct val="100000"/>
+                <a:spcPct val="130000"/>
               </a:lnSpc>
-              <a:defRPr sz="2800"/>
+              <a:defRPr sz="1300"/>
             </a:pPr>
             <a:r>
-              <a:rPr sz="2800" b="1" u="none">
-                <a:solidFill>
-                  <a:srgbClr val="1C1B19"/>
-                </a:solidFill>
-                <a:latin typeface="Times New Roman"/>
-                <a:ea typeface="Noto Serif CJK SC"/>
-              </a:rPr>
-              <a:t>一轮复习文言文《师说》</a:t>
+              <a:rPr sz="1300" b="1" u="none">
+                <a:solidFill>
+                  <a:srgbClr val="C00000"/>
+                </a:solidFill>
+                <a:latin typeface="Times New Roman"/>
+                <a:ea typeface="Noto Serif CJK SC"/>
+              </a:rPr>
+              <a:t>温馨提示：</a:t>
+            </a:r>
+            <a:r>
+              <a:rPr sz="1300" b="0" u="none">
+                <a:solidFill>
+                  <a:srgbClr val="2B2620"/>
+                </a:solidFill>
+                <a:latin typeface="Times New Roman"/>
+                <a:ea typeface="Noto Serif CJK SC"/>
+              </a:rPr>
+              <a:t>全体齐声朗诵，落实背诵默写</a:t>
             </a:r>
           </a:p>
         </p:txBody>
@@ -3281,16 +3291,16 @@
         </p:nvSpPr>
         <p:spPr>
           <a:xfrm>
-            <a:off x="10591495" y="5074920"/>
-            <a:ext cx="658368" cy="658368"/>
+            <a:off x="868680" y="1097280"/>
+            <a:ext cx="1042416" cy="475488"/>
           </a:xfrm>
           <a:prstGeom prst="roundRect">
             <a:avLst>
-              <a:gd name="adj" fmla="val 8000"/>
+              <a:gd name="adj" fmla="val 25000"/>
             </a:avLst>
           </a:prstGeom>
           <a:solidFill>
-            <a:srgbClr val="A6322A"/>
+            <a:srgbClr val="FFE699"/>
           </a:solidFill>
           <a:ln>
             <a:noFill/>
@@ -3327,8 +3337,8 @@
         </p:nvSpPr>
         <p:spPr>
           <a:xfrm>
-            <a:off x="10591495" y="5166360"/>
-            <a:ext cx="658368" cy="502920"/>
+            <a:off x="868680" y="1124712"/>
+            <a:ext cx="1042416" cy="420624"/>
           </a:xfrm>
           <a:prstGeom prst="rect">
             <a:avLst/>
@@ -3345,18 +3355,17 @@
               <a:lnSpc>
                 <a:spcPct val="130000"/>
               </a:lnSpc>
-              <a:defRPr sz="1400"/>
+              <a:defRPr sz="1500"/>
             </a:pPr>
             <a:r>
               <a:rPr sz="1500" b="1" u="none">
                 <a:solidFill>
-                  <a:srgbClr val="FFFFFF"/>
-                </a:solidFill>
-                <a:latin typeface="Times New Roman"/>
-                <a:ea typeface="Noto Serif CJK SC"/>
-              </a:rPr>
-              <a:t>语
-文</a:t>
+                  <a:srgbClr val="2B2620"/>
+                </a:solidFill>
+                <a:latin typeface="Times New Roman"/>
+                <a:ea typeface="Noto Serif CJK SC"/>
+              </a:rPr>
+              <a:t>学案</a:t>
             </a:r>
           </a:p>
         </p:txBody>
@@ -3369,8 +3378,8 @@
         </p:nvSpPr>
         <p:spPr>
           <a:xfrm>
-            <a:off x="868680" y="1691640"/>
-            <a:ext cx="5852160" cy="640080"/>
+            <a:off x="868680" y="1828800"/>
+            <a:ext cx="8046518" cy="2103120"/>
           </a:xfrm>
           <a:prstGeom prst="rect">
             <a:avLst/>
@@ -3385,19 +3394,19 @@
           <a:p>
             <a:pPr algn="l">
               <a:lnSpc>
-                <a:spcPct val="130000"/>
+                <a:spcPct val="128000"/>
               </a:lnSpc>
-              <a:defRPr sz="2000"/>
+              <a:defRPr sz="3700"/>
             </a:pPr>
             <a:r>
-              <a:rPr sz="2000" b="0" u="none">
-                <a:solidFill>
-                  <a:srgbClr val="4A4034"/>
-                </a:solidFill>
-                <a:latin typeface="Times New Roman"/>
-                <a:ea typeface="Noto Serif CJK SC"/>
-              </a:rPr>
-              <a:t>高三语文</a:t>
+              <a:rPr sz="3700" b="1" u="none">
+                <a:solidFill>
+                  <a:srgbClr val="2B2620"/>
+                </a:solidFill>
+                <a:latin typeface="Times New Roman"/>
+                <a:ea typeface="Noto Sans CJK SC"/>
+              </a:rPr>
+              <a:t>一轮复习文言文《师说》</a:t>
             </a:r>
           </a:p>
         </p:txBody>
@@ -3410,14 +3419,14 @@
         </p:nvSpPr>
         <p:spPr>
           <a:xfrm>
-            <a:off x="896112" y="2514600"/>
+            <a:off x="896112" y="4041648"/>
             <a:ext cx="1005840" cy="28575"/>
           </a:xfrm>
           <a:prstGeom prst="rect">
             <a:avLst/>
           </a:prstGeom>
           <a:solidFill>
-            <a:srgbClr val="A6322A"/>
+            <a:srgbClr val="9F5647"/>
           </a:solidFill>
           <a:ln>
             <a:noFill/>
@@ -3454,8 +3463,8 @@
         </p:nvSpPr>
         <p:spPr>
           <a:xfrm>
-            <a:off x="868680" y="2743200"/>
-            <a:ext cx="5852160" cy="2377440"/>
+            <a:off x="868680" y="4773168"/>
+            <a:ext cx="5852160" cy="548640"/>
           </a:xfrm>
           <a:prstGeom prst="rect">
             <a:avLst/>
@@ -3470,7 +3479,48 @@
           <a:p>
             <a:pPr algn="l">
               <a:lnSpc>
-                <a:spcPct val="160000"/>
+                <a:spcPct val="130000"/>
+              </a:lnSpc>
+              <a:defRPr sz="1900"/>
+            </a:pPr>
+            <a:r>
+              <a:rPr sz="1900" b="0" u="none">
+                <a:solidFill>
+                  <a:srgbClr val="4A4034"/>
+                </a:solidFill>
+                <a:latin typeface="Times New Roman"/>
+                <a:ea typeface="Noto Serif CJK SC"/>
+              </a:rPr>
+              <a:t>高三语文</a:t>
+            </a:r>
+          </a:p>
+        </p:txBody>
+      </p:sp>
+      <p:sp>
+        <p:nvSpPr>
+          <p:cNvPr id="11" name="TextBox 10"/>
+          <p:cNvSpPr txBox="1"/>
+          <p:nvPr/>
+        </p:nvSpPr>
+        <p:spPr>
+          <a:xfrm>
+            <a:off x="868680" y="5413248"/>
+            <a:ext cx="5852160" cy="457200"/>
+          </a:xfrm>
+          <a:prstGeom prst="rect">
+            <a:avLst/>
+          </a:prstGeom>
+          <a:noFill/>
+        </p:spPr>
+        <p:txBody>
+          <a:bodyPr wrap="square" anchor="t" lIns="54864" rIns="54864" tIns="0" bIns="0">
+            <a:spAutoFit/>
+          </a:bodyPr>
+          <a:lstStyle/>
+          <a:p>
+            <a:pPr algn="l">
+              <a:lnSpc>
+                <a:spcPct val="130000"/>
               </a:lnSpc>
               <a:defRPr sz="1300"/>
             </a:pPr>
@@ -3483,6 +3533,159 @@
                 <a:ea typeface="Noto Serif CJK SC"/>
               </a:rPr>
               <a:t>胶州四中</a:t>
+            </a:r>
+          </a:p>
+        </p:txBody>
+      </p:sp>
+      <p:sp>
+        <p:nvSpPr>
+          <p:cNvPr id="12" name="TextBox 11"/>
+          <p:cNvSpPr txBox="1"/>
+          <p:nvPr/>
+        </p:nvSpPr>
+        <p:spPr>
+          <a:xfrm>
+            <a:off x="868680" y="5897880"/>
+            <a:ext cx="1920240" cy="310896"/>
+          </a:xfrm>
+          <a:prstGeom prst="rect">
+            <a:avLst/>
+          </a:prstGeom>
+          <a:noFill/>
+        </p:spPr>
+        <p:txBody>
+          <a:bodyPr wrap="square" anchor="t" lIns="54864" rIns="54864" tIns="0" bIns="0">
+            <a:spAutoFit/>
+          </a:bodyPr>
+          <a:lstStyle/>
+          <a:p>
+            <a:pPr algn="l">
+              <a:lnSpc>
+                <a:spcPct val="130000"/>
+              </a:lnSpc>
+              <a:defRPr sz="1200"/>
+            </a:pPr>
+            <a:r>
+              <a:rPr sz="1200" b="0" u="none">
+                <a:solidFill>
+                  <a:srgbClr val="9F5647"/>
+                </a:solidFill>
+                <a:latin typeface="Times New Roman"/>
+                <a:ea typeface="Noto Serif CJK SC"/>
+              </a:rPr>
+              <a:t>班级：</a:t>
+            </a:r>
+            <a:r>
+              <a:rPr sz="1200" b="0" u="sng">
+                <a:solidFill>
+                  <a:srgbClr val="2B2620"/>
+                </a:solidFill>
+                <a:latin typeface="Times New Roman"/>
+                <a:ea typeface="Noto Serif CJK SC"/>
+              </a:rPr>
+              <a:t>　　　　　　</a:t>
+            </a:r>
+          </a:p>
+        </p:txBody>
+      </p:sp>
+      <p:sp>
+        <p:nvSpPr>
+          <p:cNvPr id="13" name="TextBox 12"/>
+          <p:cNvSpPr txBox="1"/>
+          <p:nvPr/>
+        </p:nvSpPr>
+        <p:spPr>
+          <a:xfrm>
+            <a:off x="3017520" y="5897880"/>
+            <a:ext cx="1920240" cy="310896"/>
+          </a:xfrm>
+          <a:prstGeom prst="rect">
+            <a:avLst/>
+          </a:prstGeom>
+          <a:noFill/>
+        </p:spPr>
+        <p:txBody>
+          <a:bodyPr wrap="square" anchor="t" lIns="54864" rIns="54864" tIns="0" bIns="0">
+            <a:spAutoFit/>
+          </a:bodyPr>
+          <a:lstStyle/>
+          <a:p>
+            <a:pPr algn="l">
+              <a:lnSpc>
+                <a:spcPct val="130000"/>
+              </a:lnSpc>
+              <a:defRPr sz="1200"/>
+            </a:pPr>
+            <a:r>
+              <a:rPr sz="1200" b="0" u="none">
+                <a:solidFill>
+                  <a:srgbClr val="9F5647"/>
+                </a:solidFill>
+                <a:latin typeface="Times New Roman"/>
+                <a:ea typeface="Noto Serif CJK SC"/>
+              </a:rPr>
+              <a:t>主备人：</a:t>
+            </a:r>
+            <a:r>
+              <a:rPr sz="1200" b="0" u="sng">
+                <a:solidFill>
+                  <a:srgbClr val="2B2620"/>
+                </a:solidFill>
+                <a:latin typeface="Times New Roman"/>
+                <a:ea typeface="Noto Serif CJK SC"/>
+              </a:rPr>
+              <a:t>　　　　　　</a:t>
+            </a:r>
+          </a:p>
+        </p:txBody>
+      </p:sp>
+      <p:sp>
+        <p:nvSpPr>
+          <p:cNvPr id="14" name="TextBox 13"/>
+          <p:cNvSpPr txBox="1"/>
+          <p:nvPr/>
+        </p:nvSpPr>
+        <p:spPr>
+          <a:xfrm>
+            <a:off x="5166360" y="5897880"/>
+            <a:ext cx="1920240" cy="310896"/>
+          </a:xfrm>
+          <a:prstGeom prst="rect">
+            <a:avLst/>
+          </a:prstGeom>
+          <a:noFill/>
+        </p:spPr>
+        <p:txBody>
+          <a:bodyPr wrap="square" anchor="t" lIns="54864" rIns="54864" tIns="0" bIns="0">
+            <a:spAutoFit/>
+          </a:bodyPr>
+          <a:lstStyle/>
+          <a:p>
+            <a:pPr algn="l">
+              <a:lnSpc>
+                <a:spcPct val="130000"/>
+              </a:lnSpc>
+              <a:defRPr sz="1200"/>
+            </a:pPr>
+            <a:r>
+              <a:rPr sz="1200" b="0" u="none">
+                <a:solidFill>
+                  <a:srgbClr val="9F5647"/>
+                </a:solidFill>
+                <a:latin typeface="Times New Roman"/>
+                <a:ea typeface="Noto Serif CJK SC"/>
+              </a:rPr>
+              <a:t>日期：</a:t>
+            </a:r>
+            <a:r>
+              <a:rPr sz="1200" b="0" u="sng">
+                <a:solidFill>
+                  <a:srgbClr val="2B2620"/>
+                </a:solidFill>
+                <a:latin typeface="Times New Roman"/>
+                <a:ea typeface="Noto Serif CJK SC"/>
+              </a:rPr>
+              <a:t>　　　　　　</a:t>
             </a:r>
           </a:p>
         </p:txBody>
@@ -3514,13 +3717,13 @@
         <p:spPr>
           <a:xfrm>
             <a:off x="0" y="0"/>
-            <a:ext cx="12191695" cy="822960"/>
+            <a:ext cx="12191695" cy="82296"/>
           </a:xfrm>
           <a:prstGeom prst="rect">
             <a:avLst/>
           </a:prstGeom>
           <a:solidFill>
-            <a:srgbClr val="1C1B19"/>
+            <a:srgbClr val="3B3226"/>
           </a:solidFill>
           <a:ln>
             <a:noFill/>
@@ -3551,58 +3754,14 @@
       </p:sp>
       <p:sp>
         <p:nvSpPr>
-          <p:cNvPr id="3" name="Rectangle 2"/>
-          <p:cNvSpPr/>
-          <p:nvPr/>
-        </p:nvSpPr>
-        <p:spPr>
-          <a:xfrm>
-            <a:off x="0" y="822960"/>
-            <a:ext cx="12191695" cy="45720"/>
-          </a:xfrm>
-          <a:prstGeom prst="rect">
-            <a:avLst/>
-          </a:prstGeom>
-          <a:solidFill>
-            <a:srgbClr val="A6322A"/>
-          </a:solidFill>
-          <a:ln>
-            <a:noFill/>
-          </a:ln>
-          <a:effectLst/>
-        </p:spPr>
-        <p:style>
-          <a:lnRef idx="1">
-            <a:schemeClr val="accent1"/>
-          </a:lnRef>
-          <a:fillRef idx="3">
-            <a:schemeClr val="accent1"/>
-          </a:fillRef>
-          <a:effectRef idx="2">
-            <a:schemeClr val="accent1"/>
-          </a:effectRef>
-          <a:fontRef idx="minor">
-            <a:schemeClr val="lt1"/>
-          </a:fontRef>
-        </p:style>
-        <p:txBody>
-          <a:bodyPr rtlCol="0" anchor="ctr"/>
-          <a:lstStyle/>
-          <a:p>
-            <a:pPr algn="ctr"/>
-          </a:p>
-        </p:txBody>
-      </p:sp>
-      <p:sp>
-        <p:nvSpPr>
-          <p:cNvPr id="4" name="TextBox 3"/>
+          <p:cNvPr id="3" name="TextBox 2"/>
           <p:cNvSpPr txBox="1"/>
           <p:nvPr/>
         </p:nvSpPr>
         <p:spPr>
           <a:xfrm>
-            <a:off x="548640" y="137160"/>
-            <a:ext cx="8442656" cy="548640"/>
+            <a:off x="548640" y="292608"/>
+            <a:ext cx="7985455" cy="566928"/>
           </a:xfrm>
           <a:prstGeom prst="rect">
             <a:avLst/>
@@ -3624,7 +3783,7 @@
             <a:r>
               <a:rPr sz="2600" b="1" u="none">
                 <a:solidFill>
-                  <a:srgbClr val="FFFFFF"/>
+                  <a:srgbClr val="3B3226"/>
                 </a:solidFill>
                 <a:latin typeface="Times New Roman"/>
                 <a:ea typeface="Noto Serif CJK SC"/>
@@ -3636,13 +3795,13 @@
       </p:sp>
       <p:sp>
         <p:nvSpPr>
-          <p:cNvPr id="5" name="Rounded Rectangle 4"/>
+          <p:cNvPr id="4" name="Rounded Rectangle 3"/>
           <p:cNvSpPr/>
           <p:nvPr/>
         </p:nvSpPr>
         <p:spPr>
           <a:xfrm>
-            <a:off x="10966399" y="219456"/>
+            <a:off x="10966399" y="384048"/>
             <a:ext cx="676656" cy="365760"/>
           </a:xfrm>
           <a:prstGeom prst="roundRect">
@@ -3651,7 +3810,7 @@
             </a:avLst>
           </a:prstGeom>
           <a:solidFill>
-            <a:srgbClr val="2E4A78"/>
+            <a:srgbClr val="C00000"/>
           </a:solidFill>
           <a:ln>
             <a:noFill/>
@@ -3682,13 +3841,13 @@
       </p:sp>
       <p:sp>
         <p:nvSpPr>
-          <p:cNvPr id="6" name="TextBox 5"/>
+          <p:cNvPr id="5" name="TextBox 4"/>
           <p:cNvSpPr txBox="1"/>
           <p:nvPr/>
         </p:nvSpPr>
         <p:spPr>
           <a:xfrm>
-            <a:off x="10966399" y="237744"/>
+            <a:off x="10966399" y="402336"/>
             <a:ext cx="676656" cy="329184"/>
           </a:xfrm>
           <a:prstGeom prst="rect">
@@ -3723,6 +3882,50 @@
       </p:sp>
       <p:sp>
         <p:nvSpPr>
+          <p:cNvPr id="6" name="Rectangle 5"/>
+          <p:cNvSpPr/>
+          <p:nvPr/>
+        </p:nvSpPr>
+        <p:spPr>
+          <a:xfrm>
+            <a:off x="548640" y="950976"/>
+            <a:ext cx="11094415" cy="9525"/>
+          </a:xfrm>
+          <a:prstGeom prst="rect">
+            <a:avLst/>
+          </a:prstGeom>
+          <a:solidFill>
+            <a:srgbClr val="D8DEE8"/>
+          </a:solidFill>
+          <a:ln>
+            <a:noFill/>
+          </a:ln>
+          <a:effectLst/>
+        </p:spPr>
+        <p:style>
+          <a:lnRef idx="1">
+            <a:schemeClr val="accent1"/>
+          </a:lnRef>
+          <a:fillRef idx="3">
+            <a:schemeClr val="accent1"/>
+          </a:fillRef>
+          <a:effectRef idx="2">
+            <a:schemeClr val="accent1"/>
+          </a:effectRef>
+          <a:fontRef idx="minor">
+            <a:schemeClr val="lt1"/>
+          </a:fontRef>
+        </p:style>
+        <p:txBody>
+          <a:bodyPr rtlCol="0" anchor="ctr"/>
+          <a:lstStyle/>
+          <a:p>
+            <a:pPr algn="ctr"/>
+          </a:p>
+        </p:txBody>
+      </p:sp>
+      <p:sp>
+        <p:nvSpPr>
           <p:cNvPr id="7" name="TextBox 6"/>
           <p:cNvSpPr txBox="1"/>
           <p:nvPr/>
@@ -3752,7 +3955,7 @@
             <a:r>
               <a:rPr sz="2200" b="0" u="none">
                 <a:solidFill>
-                  <a:srgbClr val="23211E"/>
+                  <a:srgbClr val="2B2620"/>
                 </a:solidFill>
                 <a:latin typeface="Times New Roman"/>
                 <a:ea typeface="Noto Serif CJK SC"/>
@@ -3777,7 +3980,7 @@
             <a:avLst/>
           </a:prstGeom>
           <a:solidFill>
-            <a:srgbClr val="A6322A"/>
+            <a:srgbClr val="9F5647"/>
           </a:solidFill>
           <a:ln>
             <a:noFill/>
@@ -3815,7 +4018,7 @@
         <p:spPr>
           <a:xfrm>
             <a:off x="548640" y="6345936"/>
-            <a:ext cx="8595360" cy="274320"/>
+            <a:ext cx="7498079" cy="274320"/>
           </a:xfrm>
           <a:prstGeom prst="rect">
             <a:avLst/>
@@ -3921,7 +4124,7 @@
             <a:avLst/>
           </a:prstGeom>
           <a:solidFill>
-            <a:srgbClr val="1C1B19"/>
+            <a:srgbClr val="FFFFFF"/>
           </a:solidFill>
           <a:ln>
             <a:noFill/>
@@ -3958,14 +4161,14 @@
         </p:nvSpPr>
         <p:spPr>
           <a:xfrm>
-            <a:off x="0" y="6711696"/>
-            <a:ext cx="12191695" cy="146304"/>
+            <a:off x="0" y="0"/>
+            <a:ext cx="12191695" cy="109728"/>
           </a:xfrm>
           <a:prstGeom prst="rect">
             <a:avLst/>
           </a:prstGeom>
           <a:solidFill>
-            <a:srgbClr val="A6322A"/>
+            <a:srgbClr val="3B3226"/>
           </a:solidFill>
           <a:ln>
             <a:noFill/>
@@ -3996,14 +4199,102 @@
       </p:sp>
       <p:sp>
         <p:nvSpPr>
-          <p:cNvPr id="4" name="TextBox 3"/>
+          <p:cNvPr id="4" name="Rectangle 3"/>
+          <p:cNvSpPr/>
+          <p:nvPr/>
+        </p:nvSpPr>
+        <p:spPr>
+          <a:xfrm>
+            <a:off x="0" y="6748272"/>
+            <a:ext cx="12191695" cy="109728"/>
+          </a:xfrm>
+          <a:prstGeom prst="rect">
+            <a:avLst/>
+          </a:prstGeom>
+          <a:solidFill>
+            <a:srgbClr val="9F5647"/>
+          </a:solidFill>
+          <a:ln>
+            <a:noFill/>
+          </a:ln>
+          <a:effectLst/>
+        </p:spPr>
+        <p:style>
+          <a:lnRef idx="1">
+            <a:schemeClr val="accent1"/>
+          </a:lnRef>
+          <a:fillRef idx="3">
+            <a:schemeClr val="accent1"/>
+          </a:fillRef>
+          <a:effectRef idx="2">
+            <a:schemeClr val="accent1"/>
+          </a:effectRef>
+          <a:fontRef idx="minor">
+            <a:schemeClr val="lt1"/>
+          </a:fontRef>
+        </p:style>
+        <p:txBody>
+          <a:bodyPr rtlCol="0" anchor="ctr"/>
+          <a:lstStyle/>
+          <a:p>
+            <a:pPr algn="ctr"/>
+          </a:p>
+        </p:txBody>
+      </p:sp>
+      <p:sp>
+        <p:nvSpPr>
+          <p:cNvPr id="5" name="Rectangle 4"/>
+          <p:cNvSpPr/>
+          <p:nvPr/>
+        </p:nvSpPr>
+        <p:spPr>
+          <a:xfrm>
+            <a:off x="777240" y="2331720"/>
+            <a:ext cx="128016" cy="1371600"/>
+          </a:xfrm>
+          <a:prstGeom prst="rect">
+            <a:avLst/>
+          </a:prstGeom>
+          <a:solidFill>
+            <a:srgbClr val="9F5647"/>
+          </a:solidFill>
+          <a:ln>
+            <a:noFill/>
+          </a:ln>
+          <a:effectLst/>
+        </p:spPr>
+        <p:style>
+          <a:lnRef idx="1">
+            <a:schemeClr val="accent1"/>
+          </a:lnRef>
+          <a:fillRef idx="3">
+            <a:schemeClr val="accent1"/>
+          </a:fillRef>
+          <a:effectRef idx="2">
+            <a:schemeClr val="accent1"/>
+          </a:effectRef>
+          <a:fontRef idx="minor">
+            <a:schemeClr val="lt1"/>
+          </a:fontRef>
+        </p:style>
+        <p:txBody>
+          <a:bodyPr rtlCol="0" anchor="ctr"/>
+          <a:lstStyle/>
+          <a:p>
+            <a:pPr algn="ctr"/>
+          </a:p>
+        </p:txBody>
+      </p:sp>
+      <p:sp>
+        <p:nvSpPr>
+          <p:cNvPr id="6" name="TextBox 5"/>
           <p:cNvSpPr txBox="1"/>
           <p:nvPr/>
         </p:nvSpPr>
         <p:spPr>
           <a:xfrm>
-            <a:off x="777240" y="1188720"/>
-            <a:ext cx="3657600" cy="1554480"/>
+            <a:off x="1143000" y="1234440"/>
+            <a:ext cx="3657600" cy="1463040"/>
           </a:xfrm>
           <a:prstGeom prst="rect">
             <a:avLst/>
@@ -4020,12 +4311,12 @@
               <a:lnSpc>
                 <a:spcPct val="130000"/>
               </a:lnSpc>
-              <a:defRPr sz="9200"/>
+              <a:defRPr sz="8800"/>
             </a:pPr>
             <a:r>
-              <a:rPr sz="9200" b="1" u="none">
-                <a:solidFill>
-                  <a:srgbClr val="A6322A"/>
+              <a:rPr sz="8800" b="1" u="none">
+                <a:solidFill>
+                  <a:srgbClr val="F7F2E8"/>
                 </a:solidFill>
                 <a:latin typeface="Times New Roman"/>
                 <a:ea typeface="Noto Serif CJK SC"/>
@@ -4037,14 +4328,14 @@
       </p:sp>
       <p:sp>
         <p:nvSpPr>
-          <p:cNvPr id="5" name="TextBox 4"/>
+          <p:cNvPr id="7" name="TextBox 6"/>
           <p:cNvSpPr txBox="1"/>
           <p:nvPr/>
         </p:nvSpPr>
         <p:spPr>
           <a:xfrm>
-            <a:off x="841248" y="2834640"/>
-            <a:ext cx="10180015" cy="1097280"/>
+            <a:off x="1143000" y="2377440"/>
+            <a:ext cx="9905695" cy="1005840"/>
           </a:xfrm>
           <a:prstGeom prst="rect">
             <a:avLst/>
@@ -4066,7 +4357,7 @@
             <a:r>
               <a:rPr sz="4000" b="1" u="none">
                 <a:solidFill>
-                  <a:srgbClr val="FFFFFF"/>
+                  <a:srgbClr val="3B3226"/>
                 </a:solidFill>
                 <a:latin typeface="Times New Roman"/>
                 <a:ea typeface="Noto Serif CJK SC"/>
@@ -4096,20 +4387,20 @@
       <p:grpSpPr/>
       <p:sp>
         <p:nvSpPr>
-          <p:cNvPr id="2" name="Rectangle 1"/>
+          <p:cNvPr id="2" name="Oval 1"/>
           <p:cNvSpPr/>
           <p:nvPr/>
         </p:nvSpPr>
         <p:spPr>
-          <a:xfrm>
-            <a:off x="11688775" y="457200"/>
-            <a:ext cx="73152" cy="1463040"/>
-          </a:xfrm>
-          <a:prstGeom prst="rect">
+          <a:xfrm rot="19920000">
+            <a:off x="11018520" y="201168"/>
+            <a:ext cx="777240" cy="310896"/>
+          </a:xfrm>
+          <a:prstGeom prst="ellipse">
             <a:avLst/>
           </a:prstGeom>
           <a:solidFill>
-            <a:srgbClr val="D9CDB8"/>
+            <a:srgbClr val="EDEFE3"/>
           </a:solidFill>
           <a:ln>
             <a:noFill/>
@@ -4140,20 +4431,20 @@
       </p:sp>
       <p:sp>
         <p:nvSpPr>
-          <p:cNvPr id="3" name="Rectangle 2"/>
+          <p:cNvPr id="3" name="Oval 2"/>
           <p:cNvSpPr/>
           <p:nvPr/>
         </p:nvSpPr>
         <p:spPr>
-          <a:xfrm>
-            <a:off x="0" y="365760"/>
-            <a:ext cx="12191695" cy="12700"/>
-          </a:xfrm>
-          <a:prstGeom prst="rect">
+          <a:xfrm rot="720000">
+            <a:off x="11475720" y="502920"/>
+            <a:ext cx="640080" cy="256032"/>
+          </a:xfrm>
+          <a:prstGeom prst="ellipse">
             <a:avLst/>
           </a:prstGeom>
           <a:solidFill>
-            <a:srgbClr val="BCA98C"/>
+            <a:srgbClr val="EDEFE3"/>
           </a:solidFill>
           <a:ln>
             <a:noFill/>
@@ -4184,20 +4475,20 @@
       </p:sp>
       <p:sp>
         <p:nvSpPr>
-          <p:cNvPr id="4" name="Rectangle 3"/>
+          <p:cNvPr id="4" name="Oval 3"/>
           <p:cNvSpPr/>
           <p:nvPr/>
         </p:nvSpPr>
         <p:spPr>
-          <a:xfrm>
-            <a:off x="0" y="1133856"/>
-            <a:ext cx="12191695" cy="12700"/>
-          </a:xfrm>
-          <a:prstGeom prst="rect">
+          <a:xfrm rot="21120000">
+            <a:off x="10835640" y="658368"/>
+            <a:ext cx="566928" cy="219456"/>
+          </a:xfrm>
+          <a:prstGeom prst="ellipse">
             <a:avLst/>
           </a:prstGeom>
           <a:solidFill>
-            <a:srgbClr val="BCA98C"/>
+            <a:srgbClr val="EDEFE3"/>
           </a:solidFill>
           <a:ln>
             <a:noFill/>
@@ -4234,14 +4525,14 @@
         </p:nvSpPr>
         <p:spPr>
           <a:xfrm>
-            <a:off x="566928" y="530352"/>
-            <a:ext cx="54864" cy="438912"/>
+            <a:off x="0" y="0"/>
+            <a:ext cx="12191695" cy="457200"/>
           </a:xfrm>
           <a:prstGeom prst="rect">
             <a:avLst/>
           </a:prstGeom>
           <a:solidFill>
-            <a:srgbClr val="A6322A"/>
+            <a:srgbClr val="F7F2E8"/>
           </a:solidFill>
           <a:ln>
             <a:noFill/>
@@ -4272,14 +4563,109 @@
       </p:sp>
       <p:sp>
         <p:nvSpPr>
-          <p:cNvPr id="6" name="TextBox 5"/>
+          <p:cNvPr id="6" name="Rectangle 5"/>
+          <p:cNvSpPr/>
+          <p:nvPr/>
+        </p:nvSpPr>
+        <p:spPr>
+          <a:xfrm>
+            <a:off x="0" y="457200"/>
+            <a:ext cx="12191695" cy="12700"/>
+          </a:xfrm>
+          <a:prstGeom prst="rect">
+            <a:avLst/>
+          </a:prstGeom>
+          <a:solidFill>
+            <a:srgbClr val="9F5647"/>
+          </a:solidFill>
+          <a:ln>
+            <a:noFill/>
+          </a:ln>
+          <a:effectLst/>
+        </p:spPr>
+        <p:style>
+          <a:lnRef idx="1">
+            <a:schemeClr val="accent1"/>
+          </a:lnRef>
+          <a:fillRef idx="3">
+            <a:schemeClr val="accent1"/>
+          </a:fillRef>
+          <a:effectRef idx="2">
+            <a:schemeClr val="accent1"/>
+          </a:effectRef>
+          <a:fontRef idx="minor">
+            <a:schemeClr val="lt1"/>
+          </a:fontRef>
+        </p:style>
+        <p:txBody>
+          <a:bodyPr rtlCol="0" anchor="ctr"/>
+          <a:lstStyle/>
+          <a:p>
+            <a:pPr algn="ctr"/>
+          </a:p>
+        </p:txBody>
+      </p:sp>
+      <p:sp>
+        <p:nvSpPr>
+          <p:cNvPr id="7" name="TextBox 6"/>
           <p:cNvSpPr txBox="1"/>
           <p:nvPr/>
         </p:nvSpPr>
         <p:spPr>
           <a:xfrm>
-            <a:off x="777240" y="502920"/>
-            <a:ext cx="9631375" cy="502920"/>
+            <a:off x="548640" y="73152"/>
+            <a:ext cx="11094415" cy="329184"/>
+          </a:xfrm>
+          <a:prstGeom prst="rect">
+            <a:avLst/>
+          </a:prstGeom>
+          <a:noFill/>
+        </p:spPr>
+        <p:txBody>
+          <a:bodyPr wrap="square" anchor="t" lIns="54864" rIns="54864" tIns="0" bIns="0">
+            <a:spAutoFit/>
+          </a:bodyPr>
+          <a:lstStyle/>
+          <a:p>
+            <a:pPr algn="l">
+              <a:lnSpc>
+                <a:spcPct val="130000"/>
+              </a:lnSpc>
+              <a:defRPr sz="1300"/>
+            </a:pPr>
+            <a:r>
+              <a:rPr sz="1300" b="1" u="none">
+                <a:solidFill>
+                  <a:srgbClr val="C00000"/>
+                </a:solidFill>
+                <a:latin typeface="Times New Roman"/>
+                <a:ea typeface="Noto Serif CJK SC"/>
+              </a:rPr>
+              <a:t>温馨提示：</a:t>
+            </a:r>
+            <a:r>
+              <a:rPr sz="1300" b="0" u="none">
+                <a:solidFill>
+                  <a:srgbClr val="2B2620"/>
+                </a:solidFill>
+                <a:latin typeface="Times New Roman"/>
+                <a:ea typeface="Noto Serif CJK SC"/>
+              </a:rPr>
+              <a:t>一轮复习文言文《师说》</a:t>
+            </a:r>
+          </a:p>
+        </p:txBody>
+      </p:sp>
+      <p:sp>
+        <p:nvSpPr>
+          <p:cNvPr id="8" name="TextBox 7"/>
+          <p:cNvSpPr txBox="1"/>
+          <p:nvPr/>
+        </p:nvSpPr>
+        <p:spPr>
+          <a:xfrm>
+            <a:off x="548640" y="603504"/>
+            <a:ext cx="9265615" cy="713232"/>
           </a:xfrm>
           <a:prstGeom prst="rect">
             <a:avLst/>
@@ -4301,10 +4687,10 @@
             <a:r>
               <a:rPr sz="2800" b="1" u="none">
                 <a:solidFill>
-                  <a:srgbClr val="1C1B19"/>
-                </a:solidFill>
-                <a:latin typeface="Times New Roman"/>
-                <a:ea typeface="Noto Serif CJK SC"/>
+                  <a:srgbClr val="2B2620"/>
+                </a:solidFill>
+                <a:latin typeface="Times New Roman"/>
+                <a:ea typeface="Noto Sans CJK SC"/>
               </a:rPr>
               <a:t>参考答案</a:t>
             </a:r>
@@ -4313,48 +4699,7 @@
       </p:sp>
       <p:sp>
         <p:nvSpPr>
-          <p:cNvPr id="7" name="TextBox 6"/>
-          <p:cNvSpPr txBox="1"/>
-          <p:nvPr/>
-        </p:nvSpPr>
-        <p:spPr>
-          <a:xfrm>
-            <a:off x="8899855" y="566928"/>
-            <a:ext cx="2743200" cy="365760"/>
-          </a:xfrm>
-          <a:prstGeom prst="rect">
-            <a:avLst/>
-          </a:prstGeom>
-          <a:noFill/>
-        </p:spPr>
-        <p:txBody>
-          <a:bodyPr wrap="square" anchor="t" lIns="54864" rIns="54864" tIns="0" bIns="0">
-            <a:spAutoFit/>
-          </a:bodyPr>
-          <a:lstStyle/>
-          <a:p>
-            <a:pPr algn="r">
-              <a:lnSpc>
-                <a:spcPct val="130000"/>
-              </a:lnSpc>
-              <a:defRPr sz="1300"/>
-            </a:pPr>
-            <a:r>
-              <a:rPr sz="1300" b="0" u="none">
-                <a:solidFill>
-                  <a:srgbClr val="A6322A"/>
-                </a:solidFill>
-                <a:latin typeface="Times New Roman"/>
-                <a:ea typeface="Noto Serif CJK SC"/>
-              </a:rPr>
-              <a:t>—— 答案</a:t>
-            </a:r>
-          </a:p>
-        </p:txBody>
-      </p:sp>
-      <p:sp>
-        <p:nvSpPr>
-          <p:cNvPr id="8" name="TextBox 7"/>
+          <p:cNvPr id="9" name="TextBox 8"/>
           <p:cNvSpPr txBox="1"/>
           <p:nvPr/>
         </p:nvSpPr>
@@ -4383,7 +4728,7 @@
             <a:r>
               <a:rPr sz="2600" b="0" u="none">
                 <a:solidFill>
-                  <a:srgbClr val="23211E"/>
+                  <a:srgbClr val="2B2620"/>
                 </a:solidFill>
                 <a:latin typeface="Times New Roman"/>
                 <a:ea typeface="Noto Serif CJK SC"/>
@@ -4403,7 +4748,7 @@
             <a:r>
               <a:rPr sz="2600" b="0" u="none">
                 <a:solidFill>
-                  <a:srgbClr val="23211E"/>
+                  <a:srgbClr val="2B2620"/>
                 </a:solidFill>
                 <a:latin typeface="Times New Roman"/>
                 <a:ea typeface="Noto Serif CJK SC"/>
@@ -4415,7 +4760,7 @@
       </p:sp>
       <p:sp>
         <p:nvSpPr>
-          <p:cNvPr id="9" name="Rectangle 8"/>
+          <p:cNvPr id="10" name="Rectangle 9"/>
           <p:cNvSpPr/>
           <p:nvPr/>
         </p:nvSpPr>
@@ -4428,7 +4773,7 @@
             <a:avLst/>
           </a:prstGeom>
           <a:solidFill>
-            <a:srgbClr val="A6322A"/>
+            <a:srgbClr val="9F5647"/>
           </a:solidFill>
           <a:ln>
             <a:noFill/>
@@ -4459,14 +4804,14 @@
       </p:sp>
       <p:sp>
         <p:nvSpPr>
-          <p:cNvPr id="10" name="TextBox 9"/>
+          <p:cNvPr id="11" name="TextBox 10"/>
           <p:cNvSpPr txBox="1"/>
           <p:nvPr/>
         </p:nvSpPr>
         <p:spPr>
           <a:xfrm>
             <a:off x="548640" y="6345936"/>
-            <a:ext cx="8595360" cy="274320"/>
+            <a:ext cx="7498079" cy="274320"/>
           </a:xfrm>
           <a:prstGeom prst="rect">
             <a:avLst/>
@@ -4500,7 +4845,7 @@
       </p:sp>
       <p:sp>
         <p:nvSpPr>
-          <p:cNvPr id="11" name="TextBox 10"/>
+          <p:cNvPr id="12" name="TextBox 11"/>
           <p:cNvSpPr txBox="1"/>
           <p:nvPr/>
         </p:nvSpPr>
@@ -4572,7 +4917,7 @@
             <a:avLst/>
           </a:prstGeom>
           <a:solidFill>
-            <a:srgbClr val="F3EDE3"/>
+            <a:srgbClr val="F7F2E8"/>
           </a:solidFill>
           <a:ln>
             <a:noFill/>
@@ -4616,7 +4961,7 @@
             <a:avLst/>
           </a:prstGeom>
           <a:solidFill>
-            <a:srgbClr val="1C1B19"/>
+            <a:srgbClr val="3B3226"/>
           </a:solidFill>
           <a:ln>
             <a:noFill/>
@@ -4660,7 +5005,7 @@
             <a:avLst/>
           </a:prstGeom>
           <a:solidFill>
-            <a:srgbClr val="A6322A"/>
+            <a:srgbClr val="9F5647"/>
           </a:solidFill>
           <a:ln>
             <a:noFill/>
@@ -4697,7 +5042,7 @@
         </p:nvSpPr>
         <p:spPr>
           <a:xfrm>
-            <a:off x="777240" y="731520"/>
+            <a:off x="777240" y="1005840"/>
             <a:ext cx="10637215" cy="822960"/>
           </a:xfrm>
           <a:prstGeom prst="rect">
@@ -4720,7 +5065,7 @@
             <a:r>
               <a:rPr sz="3800" b="1" u="none">
                 <a:solidFill>
-                  <a:srgbClr val="1C1B19"/>
+                  <a:srgbClr val="3B3226"/>
                 </a:solidFill>
                 <a:latin typeface="Times New Roman"/>
                 <a:ea typeface="Noto Serif CJK SC"/>
@@ -4738,8 +5083,8 @@
         </p:nvSpPr>
         <p:spPr>
           <a:xfrm>
-            <a:off x="868680" y="1783080"/>
-            <a:ext cx="10454335" cy="4251960"/>
+            <a:off x="868680" y="2852928"/>
+            <a:ext cx="10454335" cy="2999232"/>
           </a:xfrm>
           <a:prstGeom prst="rect">
             <a:avLst/>
@@ -4761,7 +5106,7 @@
             <a:r>
               <a:rPr sz="2300" b="0" u="none">
                 <a:solidFill>
-                  <a:srgbClr val="A6322A"/>
+                  <a:srgbClr val="9F5647"/>
                 </a:solidFill>
                 <a:latin typeface="Times New Roman"/>
                 <a:ea typeface="Noto Serif CJK SC"/>
@@ -4771,7 +5116,7 @@
             <a:r>
               <a:rPr sz="2300" b="0" u="none">
                 <a:solidFill>
-                  <a:srgbClr val="23211E"/>
+                  <a:srgbClr val="2B2620"/>
                 </a:solidFill>
                 <a:latin typeface="Times New Roman"/>
                 <a:ea typeface="Noto Serif CJK SC"/>
@@ -4791,7 +5136,7 @@
             <a:r>
               <a:rPr sz="2300" b="0" u="none">
                 <a:solidFill>
-                  <a:srgbClr val="A6322A"/>
+                  <a:srgbClr val="9F5647"/>
                 </a:solidFill>
                 <a:latin typeface="Times New Roman"/>
                 <a:ea typeface="Noto Serif CJK SC"/>
@@ -4801,7 +5146,7 @@
             <a:r>
               <a:rPr sz="2300" b="0" u="none">
                 <a:solidFill>
-                  <a:srgbClr val="23211E"/>
+                  <a:srgbClr val="2B2620"/>
                 </a:solidFill>
                 <a:latin typeface="Times New Roman"/>
                 <a:ea typeface="Noto Serif CJK SC"/>
@@ -4821,7 +5166,7 @@
             <a:r>
               <a:rPr sz="2300" b="0" u="none">
                 <a:solidFill>
-                  <a:srgbClr val="A6322A"/>
+                  <a:srgbClr val="9F5647"/>
                 </a:solidFill>
                 <a:latin typeface="Times New Roman"/>
                 <a:ea typeface="Noto Serif CJK SC"/>
@@ -4831,7 +5176,7 @@
             <a:r>
               <a:rPr sz="2300" b="0" u="none">
                 <a:solidFill>
-                  <a:srgbClr val="23211E"/>
+                  <a:srgbClr val="2B2620"/>
                 </a:solidFill>
                 <a:latin typeface="Times New Roman"/>
                 <a:ea typeface="Noto Serif CJK SC"/>
@@ -4956,7 +5301,7 @@
             <a:avLst/>
           </a:prstGeom>
           <a:solidFill>
-            <a:srgbClr val="1C1B19"/>
+            <a:srgbClr val="FFFFFF"/>
           </a:solidFill>
           <a:ln>
             <a:noFill/>
@@ -4993,14 +5338,14 @@
         </p:nvSpPr>
         <p:spPr>
           <a:xfrm>
-            <a:off x="0" y="6711696"/>
-            <a:ext cx="12191695" cy="146304"/>
+            <a:off x="0" y="0"/>
+            <a:ext cx="12191695" cy="109728"/>
           </a:xfrm>
           <a:prstGeom prst="rect">
             <a:avLst/>
           </a:prstGeom>
           <a:solidFill>
-            <a:srgbClr val="A6322A"/>
+            <a:srgbClr val="3B3226"/>
           </a:solidFill>
           <a:ln>
             <a:noFill/>
@@ -5031,14 +5376,102 @@
       </p:sp>
       <p:sp>
         <p:nvSpPr>
-          <p:cNvPr id="4" name="TextBox 3"/>
+          <p:cNvPr id="4" name="Rectangle 3"/>
+          <p:cNvSpPr/>
+          <p:nvPr/>
+        </p:nvSpPr>
+        <p:spPr>
+          <a:xfrm>
+            <a:off x="0" y="6748272"/>
+            <a:ext cx="12191695" cy="109728"/>
+          </a:xfrm>
+          <a:prstGeom prst="rect">
+            <a:avLst/>
+          </a:prstGeom>
+          <a:solidFill>
+            <a:srgbClr val="9F5647"/>
+          </a:solidFill>
+          <a:ln>
+            <a:noFill/>
+          </a:ln>
+          <a:effectLst/>
+        </p:spPr>
+        <p:style>
+          <a:lnRef idx="1">
+            <a:schemeClr val="accent1"/>
+          </a:lnRef>
+          <a:fillRef idx="3">
+            <a:schemeClr val="accent1"/>
+          </a:fillRef>
+          <a:effectRef idx="2">
+            <a:schemeClr val="accent1"/>
+          </a:effectRef>
+          <a:fontRef idx="minor">
+            <a:schemeClr val="lt1"/>
+          </a:fontRef>
+        </p:style>
+        <p:txBody>
+          <a:bodyPr rtlCol="0" anchor="ctr"/>
+          <a:lstStyle/>
+          <a:p>
+            <a:pPr algn="ctr"/>
+          </a:p>
+        </p:txBody>
+      </p:sp>
+      <p:sp>
+        <p:nvSpPr>
+          <p:cNvPr id="5" name="Rectangle 4"/>
+          <p:cNvSpPr/>
+          <p:nvPr/>
+        </p:nvSpPr>
+        <p:spPr>
+          <a:xfrm>
+            <a:off x="777240" y="2331720"/>
+            <a:ext cx="128016" cy="1371600"/>
+          </a:xfrm>
+          <a:prstGeom prst="rect">
+            <a:avLst/>
+          </a:prstGeom>
+          <a:solidFill>
+            <a:srgbClr val="9F5647"/>
+          </a:solidFill>
+          <a:ln>
+            <a:noFill/>
+          </a:ln>
+          <a:effectLst/>
+        </p:spPr>
+        <p:style>
+          <a:lnRef idx="1">
+            <a:schemeClr val="accent1"/>
+          </a:lnRef>
+          <a:fillRef idx="3">
+            <a:schemeClr val="accent1"/>
+          </a:fillRef>
+          <a:effectRef idx="2">
+            <a:schemeClr val="accent1"/>
+          </a:effectRef>
+          <a:fontRef idx="minor">
+            <a:schemeClr val="lt1"/>
+          </a:fontRef>
+        </p:style>
+        <p:txBody>
+          <a:bodyPr rtlCol="0" anchor="ctr"/>
+          <a:lstStyle/>
+          <a:p>
+            <a:pPr algn="ctr"/>
+          </a:p>
+        </p:txBody>
+      </p:sp>
+      <p:sp>
+        <p:nvSpPr>
+          <p:cNvPr id="6" name="TextBox 5"/>
           <p:cNvSpPr txBox="1"/>
           <p:nvPr/>
         </p:nvSpPr>
         <p:spPr>
           <a:xfrm>
-            <a:off x="777240" y="1188720"/>
-            <a:ext cx="3657600" cy="1554480"/>
+            <a:off x="1143000" y="1234440"/>
+            <a:ext cx="3657600" cy="1463040"/>
           </a:xfrm>
           <a:prstGeom prst="rect">
             <a:avLst/>
@@ -5055,12 +5488,12 @@
               <a:lnSpc>
                 <a:spcPct val="130000"/>
               </a:lnSpc>
-              <a:defRPr sz="9200"/>
+              <a:defRPr sz="8800"/>
             </a:pPr>
             <a:r>
-              <a:rPr sz="9200" b="1" u="none">
-                <a:solidFill>
-                  <a:srgbClr val="A6322A"/>
+              <a:rPr sz="8800" b="1" u="none">
+                <a:solidFill>
+                  <a:srgbClr val="F7F2E8"/>
                 </a:solidFill>
                 <a:latin typeface="Times New Roman"/>
                 <a:ea typeface="Noto Serif CJK SC"/>
@@ -5072,14 +5505,14 @@
       </p:sp>
       <p:sp>
         <p:nvSpPr>
-          <p:cNvPr id="5" name="TextBox 4"/>
+          <p:cNvPr id="7" name="TextBox 6"/>
           <p:cNvSpPr txBox="1"/>
           <p:nvPr/>
         </p:nvSpPr>
         <p:spPr>
           <a:xfrm>
-            <a:off x="841248" y="2834640"/>
-            <a:ext cx="10180015" cy="1097280"/>
+            <a:off x="1143000" y="2377440"/>
+            <a:ext cx="9905695" cy="1005840"/>
           </a:xfrm>
           <a:prstGeom prst="rect">
             <a:avLst/>
@@ -5101,7 +5534,7 @@
             <a:r>
               <a:rPr sz="4000" b="1" u="none">
                 <a:solidFill>
-                  <a:srgbClr val="FFFFFF"/>
+                  <a:srgbClr val="3B3226"/>
                 </a:solidFill>
                 <a:latin typeface="Times New Roman"/>
                 <a:ea typeface="Noto Serif CJK SC"/>
@@ -5113,14 +5546,14 @@
       </p:sp>
       <p:sp>
         <p:nvSpPr>
-          <p:cNvPr id="6" name="Rounded Rectangle 5"/>
+          <p:cNvPr id="8" name="Rounded Rectangle 7"/>
           <p:cNvSpPr/>
           <p:nvPr/>
         </p:nvSpPr>
         <p:spPr>
           <a:xfrm>
-            <a:off x="11688775" y="2011680"/>
-            <a:ext cx="365760" cy="2377440"/>
+            <a:off x="777240" y="2011680"/>
+            <a:ext cx="384048" cy="868680"/>
           </a:xfrm>
           <a:prstGeom prst="roundRect">
             <a:avLst>
@@ -5128,7 +5561,7 @@
             </a:avLst>
           </a:prstGeom>
           <a:solidFill>
-            <a:srgbClr val="A6322A"/>
+            <a:srgbClr val="9F5647"/>
           </a:solidFill>
           <a:ln>
             <a:noFill/>
@@ -5159,14 +5592,14 @@
       </p:sp>
       <p:sp>
         <p:nvSpPr>
-          <p:cNvPr id="7" name="TextBox 6"/>
+          <p:cNvPr id="9" name="TextBox 8"/>
           <p:cNvSpPr txBox="1"/>
           <p:nvPr/>
         </p:nvSpPr>
         <p:spPr>
           <a:xfrm>
-            <a:off x="11688775" y="2103120"/>
-            <a:ext cx="365760" cy="2194560"/>
+            <a:off x="1280160" y="2011680"/>
+            <a:ext cx="2011680" cy="384048"/>
           </a:xfrm>
           <a:prstGeom prst="rect">
             <a:avLst/>
@@ -5174,12 +5607,12 @@
           <a:noFill/>
         </p:spPr>
         <p:txBody>
-          <a:bodyPr wrap="square" anchor="ctr" lIns="54864" rIns="54864" tIns="0" bIns="0" vert="eaVert">
+          <a:bodyPr wrap="square" anchor="t" lIns="54864" rIns="54864" tIns="0" bIns="0">
             <a:spAutoFit/>
           </a:bodyPr>
           <a:lstStyle/>
           <a:p>
-            <a:pPr algn="ctr">
+            <a:pPr algn="l">
               <a:lnSpc>
                 <a:spcPct val="130000"/>
               </a:lnSpc>
@@ -5188,7 +5621,7 @@
             <a:r>
               <a:rPr sz="1500" b="1" u="none">
                 <a:solidFill>
-                  <a:srgbClr val="FFFFFF"/>
+                  <a:srgbClr val="9F5647"/>
                 </a:solidFill>
                 <a:latin typeface="Times New Roman"/>
                 <a:ea typeface="Noto Serif CJK SC"/>
@@ -5218,20 +5651,20 @@
       <p:grpSpPr/>
       <p:sp>
         <p:nvSpPr>
-          <p:cNvPr id="2" name="Rectangle 1"/>
+          <p:cNvPr id="2" name="Oval 1"/>
           <p:cNvSpPr/>
           <p:nvPr/>
         </p:nvSpPr>
         <p:spPr>
-          <a:xfrm>
-            <a:off x="11688775" y="457200"/>
-            <a:ext cx="73152" cy="1463040"/>
-          </a:xfrm>
-          <a:prstGeom prst="rect">
+          <a:xfrm rot="19920000">
+            <a:off x="11018520" y="201168"/>
+            <a:ext cx="777240" cy="310896"/>
+          </a:xfrm>
+          <a:prstGeom prst="ellipse">
             <a:avLst/>
           </a:prstGeom>
           <a:solidFill>
-            <a:srgbClr val="D9CDB8"/>
+            <a:srgbClr val="EDEFE3"/>
           </a:solidFill>
           <a:ln>
             <a:noFill/>
@@ -5262,20 +5695,20 @@
       </p:sp>
       <p:sp>
         <p:nvSpPr>
-          <p:cNvPr id="3" name="Rectangle 2"/>
+          <p:cNvPr id="3" name="Oval 2"/>
           <p:cNvSpPr/>
           <p:nvPr/>
         </p:nvSpPr>
         <p:spPr>
-          <a:xfrm>
-            <a:off x="0" y="365760"/>
-            <a:ext cx="12191695" cy="12700"/>
-          </a:xfrm>
-          <a:prstGeom prst="rect">
+          <a:xfrm rot="720000">
+            <a:off x="11475720" y="502920"/>
+            <a:ext cx="640080" cy="256032"/>
+          </a:xfrm>
+          <a:prstGeom prst="ellipse">
             <a:avLst/>
           </a:prstGeom>
           <a:solidFill>
-            <a:srgbClr val="BCA98C"/>
+            <a:srgbClr val="EDEFE3"/>
           </a:solidFill>
           <a:ln>
             <a:noFill/>
@@ -5306,20 +5739,20 @@
       </p:sp>
       <p:sp>
         <p:nvSpPr>
-          <p:cNvPr id="4" name="Rectangle 3"/>
+          <p:cNvPr id="4" name="Oval 3"/>
           <p:cNvSpPr/>
           <p:nvPr/>
         </p:nvSpPr>
         <p:spPr>
-          <a:xfrm>
-            <a:off x="0" y="1133856"/>
-            <a:ext cx="12191695" cy="12700"/>
-          </a:xfrm>
-          <a:prstGeom prst="rect">
+          <a:xfrm rot="21120000">
+            <a:off x="10835640" y="658368"/>
+            <a:ext cx="566928" cy="219456"/>
+          </a:xfrm>
+          <a:prstGeom prst="ellipse">
             <a:avLst/>
           </a:prstGeom>
           <a:solidFill>
-            <a:srgbClr val="BCA98C"/>
+            <a:srgbClr val="EDEFE3"/>
           </a:solidFill>
           <a:ln>
             <a:noFill/>
@@ -5356,14 +5789,14 @@
         </p:nvSpPr>
         <p:spPr>
           <a:xfrm>
-            <a:off x="566928" y="530352"/>
-            <a:ext cx="54864" cy="438912"/>
+            <a:off x="0" y="0"/>
+            <a:ext cx="12191695" cy="457200"/>
           </a:xfrm>
           <a:prstGeom prst="rect">
             <a:avLst/>
           </a:prstGeom>
           <a:solidFill>
-            <a:srgbClr val="A6322A"/>
+            <a:srgbClr val="F7F2E8"/>
           </a:solidFill>
           <a:ln>
             <a:noFill/>
@@ -5394,14 +5827,109 @@
       </p:sp>
       <p:sp>
         <p:nvSpPr>
-          <p:cNvPr id="6" name="TextBox 5"/>
+          <p:cNvPr id="6" name="Rectangle 5"/>
+          <p:cNvSpPr/>
+          <p:nvPr/>
+        </p:nvSpPr>
+        <p:spPr>
+          <a:xfrm>
+            <a:off x="0" y="457200"/>
+            <a:ext cx="12191695" cy="12700"/>
+          </a:xfrm>
+          <a:prstGeom prst="rect">
+            <a:avLst/>
+          </a:prstGeom>
+          <a:solidFill>
+            <a:srgbClr val="9F5647"/>
+          </a:solidFill>
+          <a:ln>
+            <a:noFill/>
+          </a:ln>
+          <a:effectLst/>
+        </p:spPr>
+        <p:style>
+          <a:lnRef idx="1">
+            <a:schemeClr val="accent1"/>
+          </a:lnRef>
+          <a:fillRef idx="3">
+            <a:schemeClr val="accent1"/>
+          </a:fillRef>
+          <a:effectRef idx="2">
+            <a:schemeClr val="accent1"/>
+          </a:effectRef>
+          <a:fontRef idx="minor">
+            <a:schemeClr val="lt1"/>
+          </a:fontRef>
+        </p:style>
+        <p:txBody>
+          <a:bodyPr rtlCol="0" anchor="ctr"/>
+          <a:lstStyle/>
+          <a:p>
+            <a:pPr algn="ctr"/>
+          </a:p>
+        </p:txBody>
+      </p:sp>
+      <p:sp>
+        <p:nvSpPr>
+          <p:cNvPr id="7" name="TextBox 6"/>
           <p:cNvSpPr txBox="1"/>
           <p:nvPr/>
         </p:nvSpPr>
         <p:spPr>
           <a:xfrm>
-            <a:off x="777240" y="502920"/>
-            <a:ext cx="9631375" cy="502920"/>
+            <a:off x="548640" y="73152"/>
+            <a:ext cx="11094415" cy="329184"/>
+          </a:xfrm>
+          <a:prstGeom prst="rect">
+            <a:avLst/>
+          </a:prstGeom>
+          <a:noFill/>
+        </p:spPr>
+        <p:txBody>
+          <a:bodyPr wrap="square" anchor="t" lIns="54864" rIns="54864" tIns="0" bIns="0">
+            <a:spAutoFit/>
+          </a:bodyPr>
+          <a:lstStyle/>
+          <a:p>
+            <a:pPr algn="l">
+              <a:lnSpc>
+                <a:spcPct val="130000"/>
+              </a:lnSpc>
+              <a:defRPr sz="1300"/>
+            </a:pPr>
+            <a:r>
+              <a:rPr sz="1300" b="1" u="none">
+                <a:solidFill>
+                  <a:srgbClr val="C00000"/>
+                </a:solidFill>
+                <a:latin typeface="Times New Roman"/>
+                <a:ea typeface="Noto Serif CJK SC"/>
+              </a:rPr>
+              <a:t>温馨提示：</a:t>
+            </a:r>
+            <a:r>
+              <a:rPr sz="1300" b="0" u="none">
+                <a:solidFill>
+                  <a:srgbClr val="2B2620"/>
+                </a:solidFill>
+                <a:latin typeface="Times New Roman"/>
+                <a:ea typeface="Noto Serif CJK SC"/>
+              </a:rPr>
+              <a:t>一轮复习文言文《师说》</a:t>
+            </a:r>
+          </a:p>
+        </p:txBody>
+      </p:sp>
+      <p:sp>
+        <p:nvSpPr>
+          <p:cNvPr id="8" name="TextBox 7"/>
+          <p:cNvSpPr txBox="1"/>
+          <p:nvPr/>
+        </p:nvSpPr>
+        <p:spPr>
+          <a:xfrm>
+            <a:off x="548640" y="603504"/>
+            <a:ext cx="9265615" cy="713232"/>
           </a:xfrm>
           <a:prstGeom prst="rect">
             <a:avLst/>
@@ -5423,10 +5951,10 @@
             <a:r>
               <a:rPr sz="2800" b="1" u="none">
                 <a:solidFill>
-                  <a:srgbClr val="1C1B19"/>
-                </a:solidFill>
-                <a:latin typeface="Times New Roman"/>
-                <a:ea typeface="Noto Serif CJK SC"/>
+                  <a:srgbClr val="2B2620"/>
+                </a:solidFill>
+                <a:latin typeface="Times New Roman"/>
+                <a:ea typeface="Noto Sans CJK SC"/>
               </a:rPr>
               <a:t>学习目标</a:t>
             </a:r>
@@ -5435,7 +5963,7 @@
       </p:sp>
       <p:sp>
         <p:nvSpPr>
-          <p:cNvPr id="7" name="TextBox 6"/>
+          <p:cNvPr id="9" name="TextBox 8"/>
           <p:cNvSpPr txBox="1"/>
           <p:nvPr/>
         </p:nvSpPr>
@@ -5464,7 +5992,7 @@
             <a:r>
               <a:rPr sz="2600" b="0" u="none">
                 <a:solidFill>
-                  <a:srgbClr val="A6322A"/>
+                  <a:srgbClr val="9F5647"/>
                 </a:solidFill>
                 <a:latin typeface="Times New Roman"/>
                 <a:ea typeface="Noto Serif CJK SC"/>
@@ -5474,7 +6002,7 @@
             <a:r>
               <a:rPr sz="2600" b="0" u="none">
                 <a:solidFill>
-                  <a:srgbClr val="23211E"/>
+                  <a:srgbClr val="2B2620"/>
                 </a:solidFill>
                 <a:latin typeface="Times New Roman"/>
                 <a:ea typeface="Noto Serif CJK SC"/>
@@ -5494,7 +6022,7 @@
             <a:r>
               <a:rPr sz="2600" b="0" u="none">
                 <a:solidFill>
-                  <a:srgbClr val="A6322A"/>
+                  <a:srgbClr val="9F5647"/>
                 </a:solidFill>
                 <a:latin typeface="Times New Roman"/>
                 <a:ea typeface="Noto Serif CJK SC"/>
@@ -5504,7 +6032,7 @@
             <a:r>
               <a:rPr sz="2600" b="0" u="none">
                 <a:solidFill>
-                  <a:srgbClr val="23211E"/>
+                  <a:srgbClr val="2B2620"/>
                 </a:solidFill>
                 <a:latin typeface="Times New Roman"/>
                 <a:ea typeface="Noto Serif CJK SC"/>
@@ -5524,7 +6052,7 @@
             <a:r>
               <a:rPr sz="2600" b="0" u="none">
                 <a:solidFill>
-                  <a:srgbClr val="A6322A"/>
+                  <a:srgbClr val="9F5647"/>
                 </a:solidFill>
                 <a:latin typeface="Times New Roman"/>
                 <a:ea typeface="Noto Serif CJK SC"/>
@@ -5534,7 +6062,7 @@
             <a:r>
               <a:rPr sz="2600" b="0" u="none">
                 <a:solidFill>
-                  <a:srgbClr val="23211E"/>
+                  <a:srgbClr val="2B2620"/>
                 </a:solidFill>
                 <a:latin typeface="Times New Roman"/>
                 <a:ea typeface="Noto Serif CJK SC"/>
@@ -5546,7 +6074,7 @@
       </p:sp>
       <p:sp>
         <p:nvSpPr>
-          <p:cNvPr id="8" name="Rectangle 7"/>
+          <p:cNvPr id="10" name="Rectangle 9"/>
           <p:cNvSpPr/>
           <p:nvPr/>
         </p:nvSpPr>
@@ -5559,7 +6087,7 @@
             <a:avLst/>
           </a:prstGeom>
           <a:solidFill>
-            <a:srgbClr val="A6322A"/>
+            <a:srgbClr val="9F5647"/>
           </a:solidFill>
           <a:ln>
             <a:noFill/>
@@ -5590,14 +6118,14 @@
       </p:sp>
       <p:sp>
         <p:nvSpPr>
-          <p:cNvPr id="9" name="TextBox 8"/>
+          <p:cNvPr id="11" name="TextBox 10"/>
           <p:cNvSpPr txBox="1"/>
           <p:nvPr/>
         </p:nvSpPr>
         <p:spPr>
           <a:xfrm>
             <a:off x="548640" y="6345936"/>
-            <a:ext cx="8595360" cy="274320"/>
+            <a:ext cx="7498079" cy="274320"/>
           </a:xfrm>
           <a:prstGeom prst="rect">
             <a:avLst/>
@@ -5631,7 +6159,7 @@
       </p:sp>
       <p:sp>
         <p:nvSpPr>
-          <p:cNvPr id="10" name="TextBox 9"/>
+          <p:cNvPr id="12" name="TextBox 11"/>
           <p:cNvSpPr txBox="1"/>
           <p:nvPr/>
         </p:nvSpPr>
@@ -5690,20 +6218,20 @@
       <p:grpSpPr/>
       <p:sp>
         <p:nvSpPr>
-          <p:cNvPr id="2" name="Rectangle 1"/>
+          <p:cNvPr id="2" name="Oval 1"/>
           <p:cNvSpPr/>
           <p:nvPr/>
         </p:nvSpPr>
         <p:spPr>
-          <a:xfrm>
-            <a:off x="11688775" y="457200"/>
-            <a:ext cx="73152" cy="1463040"/>
-          </a:xfrm>
-          <a:prstGeom prst="rect">
+          <a:xfrm rot="19920000">
+            <a:off x="11018520" y="201168"/>
+            <a:ext cx="777240" cy="310896"/>
+          </a:xfrm>
+          <a:prstGeom prst="ellipse">
             <a:avLst/>
           </a:prstGeom>
           <a:solidFill>
-            <a:srgbClr val="D9CDB8"/>
+            <a:srgbClr val="EDEFE3"/>
           </a:solidFill>
           <a:ln>
             <a:noFill/>
@@ -5734,20 +6262,20 @@
       </p:sp>
       <p:sp>
         <p:nvSpPr>
-          <p:cNvPr id="3" name="Rectangle 2"/>
+          <p:cNvPr id="3" name="Oval 2"/>
           <p:cNvSpPr/>
           <p:nvPr/>
         </p:nvSpPr>
         <p:spPr>
-          <a:xfrm>
-            <a:off x="0" y="365760"/>
-            <a:ext cx="12191695" cy="12700"/>
-          </a:xfrm>
-          <a:prstGeom prst="rect">
+          <a:xfrm rot="720000">
+            <a:off x="11475720" y="502920"/>
+            <a:ext cx="640080" cy="256032"/>
+          </a:xfrm>
+          <a:prstGeom prst="ellipse">
             <a:avLst/>
           </a:prstGeom>
           <a:solidFill>
-            <a:srgbClr val="BCA98C"/>
+            <a:srgbClr val="EDEFE3"/>
           </a:solidFill>
           <a:ln>
             <a:noFill/>
@@ -5778,20 +6306,20 @@
       </p:sp>
       <p:sp>
         <p:nvSpPr>
-          <p:cNvPr id="4" name="Rectangle 3"/>
+          <p:cNvPr id="4" name="Oval 3"/>
           <p:cNvSpPr/>
           <p:nvPr/>
         </p:nvSpPr>
         <p:spPr>
-          <a:xfrm>
-            <a:off x="0" y="1133856"/>
-            <a:ext cx="12191695" cy="12700"/>
-          </a:xfrm>
-          <a:prstGeom prst="rect">
+          <a:xfrm rot="21120000">
+            <a:off x="10835640" y="658368"/>
+            <a:ext cx="566928" cy="219456"/>
+          </a:xfrm>
+          <a:prstGeom prst="ellipse">
             <a:avLst/>
           </a:prstGeom>
           <a:solidFill>
-            <a:srgbClr val="BCA98C"/>
+            <a:srgbClr val="EDEFE3"/>
           </a:solidFill>
           <a:ln>
             <a:noFill/>
@@ -5828,14 +6356,14 @@
         </p:nvSpPr>
         <p:spPr>
           <a:xfrm>
-            <a:off x="566928" y="530352"/>
-            <a:ext cx="54864" cy="438912"/>
+            <a:off x="0" y="0"/>
+            <a:ext cx="12191695" cy="457200"/>
           </a:xfrm>
           <a:prstGeom prst="rect">
             <a:avLst/>
           </a:prstGeom>
           <a:solidFill>
-            <a:srgbClr val="A6322A"/>
+            <a:srgbClr val="F7F2E8"/>
           </a:solidFill>
           <a:ln>
             <a:noFill/>
@@ -5866,14 +6394,109 @@
       </p:sp>
       <p:sp>
         <p:nvSpPr>
-          <p:cNvPr id="6" name="TextBox 5"/>
+          <p:cNvPr id="6" name="Rectangle 5"/>
+          <p:cNvSpPr/>
+          <p:nvPr/>
+        </p:nvSpPr>
+        <p:spPr>
+          <a:xfrm>
+            <a:off x="0" y="457200"/>
+            <a:ext cx="12191695" cy="12700"/>
+          </a:xfrm>
+          <a:prstGeom prst="rect">
+            <a:avLst/>
+          </a:prstGeom>
+          <a:solidFill>
+            <a:srgbClr val="9F5647"/>
+          </a:solidFill>
+          <a:ln>
+            <a:noFill/>
+          </a:ln>
+          <a:effectLst/>
+        </p:spPr>
+        <p:style>
+          <a:lnRef idx="1">
+            <a:schemeClr val="accent1"/>
+          </a:lnRef>
+          <a:fillRef idx="3">
+            <a:schemeClr val="accent1"/>
+          </a:fillRef>
+          <a:effectRef idx="2">
+            <a:schemeClr val="accent1"/>
+          </a:effectRef>
+          <a:fontRef idx="minor">
+            <a:schemeClr val="lt1"/>
+          </a:fontRef>
+        </p:style>
+        <p:txBody>
+          <a:bodyPr rtlCol="0" anchor="ctr"/>
+          <a:lstStyle/>
+          <a:p>
+            <a:pPr algn="ctr"/>
+          </a:p>
+        </p:txBody>
+      </p:sp>
+      <p:sp>
+        <p:nvSpPr>
+          <p:cNvPr id="7" name="TextBox 6"/>
           <p:cNvSpPr txBox="1"/>
           <p:nvPr/>
         </p:nvSpPr>
         <p:spPr>
           <a:xfrm>
-            <a:off x="777240" y="502920"/>
-            <a:ext cx="9631375" cy="502920"/>
+            <a:off x="548640" y="73152"/>
+            <a:ext cx="11094415" cy="329184"/>
+          </a:xfrm>
+          <a:prstGeom prst="rect">
+            <a:avLst/>
+          </a:prstGeom>
+          <a:noFill/>
+        </p:spPr>
+        <p:txBody>
+          <a:bodyPr wrap="square" anchor="t" lIns="54864" rIns="54864" tIns="0" bIns="0">
+            <a:spAutoFit/>
+          </a:bodyPr>
+          <a:lstStyle/>
+          <a:p>
+            <a:pPr algn="l">
+              <a:lnSpc>
+                <a:spcPct val="130000"/>
+              </a:lnSpc>
+              <a:defRPr sz="1300"/>
+            </a:pPr>
+            <a:r>
+              <a:rPr sz="1300" b="1" u="none">
+                <a:solidFill>
+                  <a:srgbClr val="C00000"/>
+                </a:solidFill>
+                <a:latin typeface="Times New Roman"/>
+                <a:ea typeface="Noto Serif CJK SC"/>
+              </a:rPr>
+              <a:t>温馨提示：</a:t>
+            </a:r>
+            <a:r>
+              <a:rPr sz="1300" b="0" u="none">
+                <a:solidFill>
+                  <a:srgbClr val="2B2620"/>
+                </a:solidFill>
+                <a:latin typeface="Times New Roman"/>
+                <a:ea typeface="Noto Serif CJK SC"/>
+              </a:rPr>
+              <a:t>一轮复习文言文《师说》</a:t>
+            </a:r>
+          </a:p>
+        </p:txBody>
+      </p:sp>
+      <p:sp>
+        <p:nvSpPr>
+          <p:cNvPr id="8" name="TextBox 7"/>
+          <p:cNvSpPr txBox="1"/>
+          <p:nvPr/>
+        </p:nvSpPr>
+        <p:spPr>
+          <a:xfrm>
+            <a:off x="548640" y="603504"/>
+            <a:ext cx="9265615" cy="713232"/>
           </a:xfrm>
           <a:prstGeom prst="rect">
             <a:avLst/>
@@ -5895,10 +6518,10 @@
             <a:r>
               <a:rPr sz="2800" b="1" u="none">
                 <a:solidFill>
-                  <a:srgbClr val="1C1B19"/>
-                </a:solidFill>
-                <a:latin typeface="Times New Roman"/>
-                <a:ea typeface="Noto Serif CJK SC"/>
+                  <a:srgbClr val="2B2620"/>
+                </a:solidFill>
+                <a:latin typeface="Times New Roman"/>
+                <a:ea typeface="Noto Sans CJK SC"/>
               </a:rPr>
               <a:t>一、重点文言字词</a:t>
             </a:r>
@@ -5907,7 +6530,7 @@
       </p:sp>
       <p:sp>
         <p:nvSpPr>
-          <p:cNvPr id="7" name="TextBox 6"/>
+          <p:cNvPr id="9" name="TextBox 8"/>
           <p:cNvSpPr txBox="1"/>
           <p:nvPr/>
         </p:nvSpPr>
@@ -5936,7 +6559,7 @@
             <a:r>
               <a:rPr sz="2200" b="0" u="none">
                 <a:solidFill>
-                  <a:srgbClr val="23211E"/>
+                  <a:srgbClr val="2B2620"/>
                 </a:solidFill>
                 <a:latin typeface="Times New Roman"/>
                 <a:ea typeface="Noto Serif CJK SC"/>
@@ -5956,7 +6579,7 @@
             <a:r>
               <a:rPr sz="2200" b="0" u="none">
                 <a:solidFill>
-                  <a:srgbClr val="23211E"/>
+                  <a:srgbClr val="2B2620"/>
                 </a:solidFill>
                 <a:latin typeface="Times New Roman"/>
                 <a:ea typeface="Noto Serif CJK SC"/>
@@ -5976,7 +6599,7 @@
             <a:r>
               <a:rPr sz="2200" b="0" u="none">
                 <a:solidFill>
-                  <a:srgbClr val="23211E"/>
+                  <a:srgbClr val="2B2620"/>
                 </a:solidFill>
                 <a:latin typeface="Times New Roman"/>
                 <a:ea typeface="Noto Serif CJK SC"/>
@@ -5996,7 +6619,7 @@
             <a:r>
               <a:rPr sz="2200" b="0" u="none">
                 <a:solidFill>
-                  <a:srgbClr val="23211E"/>
+                  <a:srgbClr val="2B2620"/>
                 </a:solidFill>
                 <a:latin typeface="Times New Roman"/>
                 <a:ea typeface="Noto Serif CJK SC"/>
@@ -6016,7 +6639,7 @@
             <a:r>
               <a:rPr sz="2200" b="0" u="none">
                 <a:solidFill>
-                  <a:srgbClr val="23211E"/>
+                  <a:srgbClr val="2B2620"/>
                 </a:solidFill>
                 <a:latin typeface="Times New Roman"/>
                 <a:ea typeface="Noto Serif CJK SC"/>
@@ -6036,7 +6659,7 @@
             <a:r>
               <a:rPr sz="2200" b="0" u="none">
                 <a:solidFill>
-                  <a:srgbClr val="23211E"/>
+                  <a:srgbClr val="2B2620"/>
                 </a:solidFill>
                 <a:latin typeface="Times New Roman"/>
                 <a:ea typeface="Noto Serif CJK SC"/>
@@ -6056,7 +6679,7 @@
             <a:r>
               <a:rPr sz="2200" b="0" u="none">
                 <a:solidFill>
-                  <a:srgbClr val="23211E"/>
+                  <a:srgbClr val="2B2620"/>
                 </a:solidFill>
                 <a:latin typeface="Times New Roman"/>
                 <a:ea typeface="Noto Serif CJK SC"/>
@@ -6068,7 +6691,7 @@
       </p:sp>
       <p:sp>
         <p:nvSpPr>
-          <p:cNvPr id="8" name="Rectangle 7"/>
+          <p:cNvPr id="10" name="Rectangle 9"/>
           <p:cNvSpPr/>
           <p:nvPr/>
         </p:nvSpPr>
@@ -6081,7 +6704,7 @@
             <a:avLst/>
           </a:prstGeom>
           <a:solidFill>
-            <a:srgbClr val="A6322A"/>
+            <a:srgbClr val="9F5647"/>
           </a:solidFill>
           <a:ln>
             <a:noFill/>
@@ -6112,14 +6735,14 @@
       </p:sp>
       <p:sp>
         <p:nvSpPr>
-          <p:cNvPr id="9" name="TextBox 8"/>
+          <p:cNvPr id="11" name="TextBox 10"/>
           <p:cNvSpPr txBox="1"/>
           <p:nvPr/>
         </p:nvSpPr>
         <p:spPr>
           <a:xfrm>
             <a:off x="548640" y="6345936"/>
-            <a:ext cx="8595360" cy="274320"/>
+            <a:ext cx="7498079" cy="274320"/>
           </a:xfrm>
           <a:prstGeom prst="rect">
             <a:avLst/>
@@ -6153,7 +6776,7 @@
       </p:sp>
       <p:sp>
         <p:nvSpPr>
-          <p:cNvPr id="10" name="TextBox 9"/>
+          <p:cNvPr id="12" name="TextBox 11"/>
           <p:cNvSpPr txBox="1"/>
           <p:nvPr/>
         </p:nvSpPr>
@@ -6212,20 +6835,20 @@
       <p:grpSpPr/>
       <p:sp>
         <p:nvSpPr>
-          <p:cNvPr id="2" name="Rectangle 1"/>
+          <p:cNvPr id="2" name="Oval 1"/>
           <p:cNvSpPr/>
           <p:nvPr/>
         </p:nvSpPr>
         <p:spPr>
-          <a:xfrm>
-            <a:off x="11688775" y="457200"/>
-            <a:ext cx="73152" cy="1463040"/>
-          </a:xfrm>
-          <a:prstGeom prst="rect">
+          <a:xfrm rot="19920000">
+            <a:off x="11018520" y="201168"/>
+            <a:ext cx="777240" cy="310896"/>
+          </a:xfrm>
+          <a:prstGeom prst="ellipse">
             <a:avLst/>
           </a:prstGeom>
           <a:solidFill>
-            <a:srgbClr val="D9CDB8"/>
+            <a:srgbClr val="EDEFE3"/>
           </a:solidFill>
           <a:ln>
             <a:noFill/>
@@ -6256,20 +6879,20 @@
       </p:sp>
       <p:sp>
         <p:nvSpPr>
-          <p:cNvPr id="3" name="Rectangle 2"/>
+          <p:cNvPr id="3" name="Oval 2"/>
           <p:cNvSpPr/>
           <p:nvPr/>
         </p:nvSpPr>
         <p:spPr>
-          <a:xfrm>
-            <a:off x="0" y="365760"/>
-            <a:ext cx="12191695" cy="12700"/>
-          </a:xfrm>
-          <a:prstGeom prst="rect">
+          <a:xfrm rot="720000">
+            <a:off x="11475720" y="502920"/>
+            <a:ext cx="640080" cy="256032"/>
+          </a:xfrm>
+          <a:prstGeom prst="ellipse">
             <a:avLst/>
           </a:prstGeom>
           <a:solidFill>
-            <a:srgbClr val="BCA98C"/>
+            <a:srgbClr val="EDEFE3"/>
           </a:solidFill>
           <a:ln>
             <a:noFill/>
@@ -6300,20 +6923,20 @@
       </p:sp>
       <p:sp>
         <p:nvSpPr>
-          <p:cNvPr id="4" name="Rectangle 3"/>
+          <p:cNvPr id="4" name="Oval 3"/>
           <p:cNvSpPr/>
           <p:nvPr/>
         </p:nvSpPr>
         <p:spPr>
-          <a:xfrm>
-            <a:off x="0" y="1133856"/>
-            <a:ext cx="12191695" cy="12700"/>
-          </a:xfrm>
-          <a:prstGeom prst="rect">
+          <a:xfrm rot="21120000">
+            <a:off x="10835640" y="658368"/>
+            <a:ext cx="566928" cy="219456"/>
+          </a:xfrm>
+          <a:prstGeom prst="ellipse">
             <a:avLst/>
           </a:prstGeom>
           <a:solidFill>
-            <a:srgbClr val="BCA98C"/>
+            <a:srgbClr val="EDEFE3"/>
           </a:solidFill>
           <a:ln>
             <a:noFill/>
@@ -6350,14 +6973,14 @@
         </p:nvSpPr>
         <p:spPr>
           <a:xfrm>
-            <a:off x="566928" y="530352"/>
-            <a:ext cx="54864" cy="438912"/>
+            <a:off x="0" y="0"/>
+            <a:ext cx="12191695" cy="457200"/>
           </a:xfrm>
           <a:prstGeom prst="rect">
             <a:avLst/>
           </a:prstGeom>
           <a:solidFill>
-            <a:srgbClr val="A6322A"/>
+            <a:srgbClr val="F7F2E8"/>
           </a:solidFill>
           <a:ln>
             <a:noFill/>
@@ -6388,14 +7011,109 @@
       </p:sp>
       <p:sp>
         <p:nvSpPr>
-          <p:cNvPr id="6" name="TextBox 5"/>
+          <p:cNvPr id="6" name="Rectangle 5"/>
+          <p:cNvSpPr/>
+          <p:nvPr/>
+        </p:nvSpPr>
+        <p:spPr>
+          <a:xfrm>
+            <a:off x="0" y="457200"/>
+            <a:ext cx="12191695" cy="12700"/>
+          </a:xfrm>
+          <a:prstGeom prst="rect">
+            <a:avLst/>
+          </a:prstGeom>
+          <a:solidFill>
+            <a:srgbClr val="9F5647"/>
+          </a:solidFill>
+          <a:ln>
+            <a:noFill/>
+          </a:ln>
+          <a:effectLst/>
+        </p:spPr>
+        <p:style>
+          <a:lnRef idx="1">
+            <a:schemeClr val="accent1"/>
+          </a:lnRef>
+          <a:fillRef idx="3">
+            <a:schemeClr val="accent1"/>
+          </a:fillRef>
+          <a:effectRef idx="2">
+            <a:schemeClr val="accent1"/>
+          </a:effectRef>
+          <a:fontRef idx="minor">
+            <a:schemeClr val="lt1"/>
+          </a:fontRef>
+        </p:style>
+        <p:txBody>
+          <a:bodyPr rtlCol="0" anchor="ctr"/>
+          <a:lstStyle/>
+          <a:p>
+            <a:pPr algn="ctr"/>
+          </a:p>
+        </p:txBody>
+      </p:sp>
+      <p:sp>
+        <p:nvSpPr>
+          <p:cNvPr id="7" name="TextBox 6"/>
           <p:cNvSpPr txBox="1"/>
           <p:nvPr/>
         </p:nvSpPr>
         <p:spPr>
           <a:xfrm>
-            <a:off x="777240" y="502920"/>
-            <a:ext cx="9631375" cy="502920"/>
+            <a:off x="548640" y="73152"/>
+            <a:ext cx="11094415" cy="329184"/>
+          </a:xfrm>
+          <a:prstGeom prst="rect">
+            <a:avLst/>
+          </a:prstGeom>
+          <a:noFill/>
+        </p:spPr>
+        <p:txBody>
+          <a:bodyPr wrap="square" anchor="t" lIns="54864" rIns="54864" tIns="0" bIns="0">
+            <a:spAutoFit/>
+          </a:bodyPr>
+          <a:lstStyle/>
+          <a:p>
+            <a:pPr algn="l">
+              <a:lnSpc>
+                <a:spcPct val="130000"/>
+              </a:lnSpc>
+              <a:defRPr sz="1300"/>
+            </a:pPr>
+            <a:r>
+              <a:rPr sz="1300" b="1" u="none">
+                <a:solidFill>
+                  <a:srgbClr val="C00000"/>
+                </a:solidFill>
+                <a:latin typeface="Times New Roman"/>
+                <a:ea typeface="Noto Serif CJK SC"/>
+              </a:rPr>
+              <a:t>温馨提示：</a:t>
+            </a:r>
+            <a:r>
+              <a:rPr sz="1300" b="0" u="none">
+                <a:solidFill>
+                  <a:srgbClr val="2B2620"/>
+                </a:solidFill>
+                <a:latin typeface="Times New Roman"/>
+                <a:ea typeface="Noto Serif CJK SC"/>
+              </a:rPr>
+              <a:t>一轮复习文言文《师说》</a:t>
+            </a:r>
+          </a:p>
+        </p:txBody>
+      </p:sp>
+      <p:sp>
+        <p:nvSpPr>
+          <p:cNvPr id="8" name="TextBox 7"/>
+          <p:cNvSpPr txBox="1"/>
+          <p:nvPr/>
+        </p:nvSpPr>
+        <p:spPr>
+          <a:xfrm>
+            <a:off x="548640" y="603504"/>
+            <a:ext cx="9265615" cy="713232"/>
           </a:xfrm>
           <a:prstGeom prst="rect">
             <a:avLst/>
@@ -6417,10 +7135,10 @@
             <a:r>
               <a:rPr sz="2800" b="1" u="none">
                 <a:solidFill>
-                  <a:srgbClr val="1C1B19"/>
-                </a:solidFill>
-                <a:latin typeface="Times New Roman"/>
-                <a:ea typeface="Noto Serif CJK SC"/>
+                  <a:srgbClr val="2B2620"/>
+                </a:solidFill>
+                <a:latin typeface="Times New Roman"/>
+                <a:ea typeface="Noto Sans CJK SC"/>
               </a:rPr>
               <a:t>二、词类活用</a:t>
             </a:r>
@@ -6429,7 +7147,7 @@
       </p:sp>
       <p:sp>
         <p:nvSpPr>
-          <p:cNvPr id="7" name="TextBox 6"/>
+          <p:cNvPr id="9" name="TextBox 8"/>
           <p:cNvSpPr txBox="1"/>
           <p:nvPr/>
         </p:nvSpPr>
@@ -6458,7 +7176,7 @@
             <a:r>
               <a:rPr sz="2400" b="0" u="none">
                 <a:solidFill>
-                  <a:srgbClr val="23211E"/>
+                  <a:srgbClr val="2B2620"/>
                 </a:solidFill>
                 <a:latin typeface="Times New Roman"/>
                 <a:ea typeface="Noto Serif CJK SC"/>
@@ -6478,7 +7196,7 @@
             <a:r>
               <a:rPr sz="2400" b="0" u="none">
                 <a:solidFill>
-                  <a:srgbClr val="23211E"/>
+                  <a:srgbClr val="2B2620"/>
                 </a:solidFill>
                 <a:latin typeface="Times New Roman"/>
                 <a:ea typeface="Noto Serif CJK SC"/>
@@ -6498,7 +7216,7 @@
             <a:r>
               <a:rPr sz="2400" b="0" u="none">
                 <a:solidFill>
-                  <a:srgbClr val="23211E"/>
+                  <a:srgbClr val="2B2620"/>
                 </a:solidFill>
                 <a:latin typeface="Times New Roman"/>
                 <a:ea typeface="Noto Serif CJK SC"/>
@@ -6518,7 +7236,7 @@
             <a:r>
               <a:rPr sz="2400" b="0" u="none">
                 <a:solidFill>
-                  <a:srgbClr val="23211E"/>
+                  <a:srgbClr val="2B2620"/>
                 </a:solidFill>
                 <a:latin typeface="Times New Roman"/>
                 <a:ea typeface="Noto Serif CJK SC"/>
@@ -6538,7 +7256,7 @@
             <a:r>
               <a:rPr sz="2400" b="0" u="none">
                 <a:solidFill>
-                  <a:srgbClr val="23211E"/>
+                  <a:srgbClr val="2B2620"/>
                 </a:solidFill>
                 <a:latin typeface="Times New Roman"/>
                 <a:ea typeface="Noto Serif CJK SC"/>
@@ -6550,7 +7268,7 @@
       </p:sp>
       <p:sp>
         <p:nvSpPr>
-          <p:cNvPr id="8" name="Rectangle 7"/>
+          <p:cNvPr id="10" name="Rectangle 9"/>
           <p:cNvSpPr/>
           <p:nvPr/>
         </p:nvSpPr>
@@ -6563,7 +7281,7 @@
             <a:avLst/>
           </a:prstGeom>
           <a:solidFill>
-            <a:srgbClr val="A6322A"/>
+            <a:srgbClr val="9F5647"/>
           </a:solidFill>
           <a:ln>
             <a:noFill/>
@@ -6594,14 +7312,14 @@
       </p:sp>
       <p:sp>
         <p:nvSpPr>
-          <p:cNvPr id="9" name="TextBox 8"/>
+          <p:cNvPr id="11" name="TextBox 10"/>
           <p:cNvSpPr txBox="1"/>
           <p:nvPr/>
         </p:nvSpPr>
         <p:spPr>
           <a:xfrm>
             <a:off x="548640" y="6345936"/>
-            <a:ext cx="8595360" cy="274320"/>
+            <a:ext cx="7498079" cy="274320"/>
           </a:xfrm>
           <a:prstGeom prst="rect">
             <a:avLst/>
@@ -6635,7 +7353,7 @@
       </p:sp>
       <p:sp>
         <p:nvSpPr>
-          <p:cNvPr id="10" name="TextBox 9"/>
+          <p:cNvPr id="12" name="TextBox 11"/>
           <p:cNvSpPr txBox="1"/>
           <p:nvPr/>
         </p:nvSpPr>
@@ -6694,20 +7412,20 @@
       <p:grpSpPr/>
       <p:sp>
         <p:nvSpPr>
-          <p:cNvPr id="2" name="Rectangle 1"/>
+          <p:cNvPr id="2" name="Oval 1"/>
           <p:cNvSpPr/>
           <p:nvPr/>
         </p:nvSpPr>
         <p:spPr>
-          <a:xfrm>
-            <a:off x="11688775" y="457200"/>
-            <a:ext cx="73152" cy="1463040"/>
-          </a:xfrm>
-          <a:prstGeom prst="rect">
+          <a:xfrm rot="19920000">
+            <a:off x="11018520" y="201168"/>
+            <a:ext cx="777240" cy="310896"/>
+          </a:xfrm>
+          <a:prstGeom prst="ellipse">
             <a:avLst/>
           </a:prstGeom>
           <a:solidFill>
-            <a:srgbClr val="D9CDB8"/>
+            <a:srgbClr val="EDEFE3"/>
           </a:solidFill>
           <a:ln>
             <a:noFill/>
@@ -6738,20 +7456,20 @@
       </p:sp>
       <p:sp>
         <p:nvSpPr>
-          <p:cNvPr id="3" name="Rectangle 2"/>
+          <p:cNvPr id="3" name="Oval 2"/>
           <p:cNvSpPr/>
           <p:nvPr/>
         </p:nvSpPr>
         <p:spPr>
-          <a:xfrm>
-            <a:off x="0" y="365760"/>
-            <a:ext cx="12191695" cy="12700"/>
-          </a:xfrm>
-          <a:prstGeom prst="rect">
+          <a:xfrm rot="720000">
+            <a:off x="11475720" y="502920"/>
+            <a:ext cx="640080" cy="256032"/>
+          </a:xfrm>
+          <a:prstGeom prst="ellipse">
             <a:avLst/>
           </a:prstGeom>
           <a:solidFill>
-            <a:srgbClr val="BCA98C"/>
+            <a:srgbClr val="EDEFE3"/>
           </a:solidFill>
           <a:ln>
             <a:noFill/>
@@ -6782,20 +7500,20 @@
       </p:sp>
       <p:sp>
         <p:nvSpPr>
-          <p:cNvPr id="4" name="Rectangle 3"/>
+          <p:cNvPr id="4" name="Oval 3"/>
           <p:cNvSpPr/>
           <p:nvPr/>
         </p:nvSpPr>
         <p:spPr>
-          <a:xfrm>
-            <a:off x="0" y="1133856"/>
-            <a:ext cx="12191695" cy="12700"/>
-          </a:xfrm>
-          <a:prstGeom prst="rect">
+          <a:xfrm rot="21120000">
+            <a:off x="10835640" y="658368"/>
+            <a:ext cx="566928" cy="219456"/>
+          </a:xfrm>
+          <a:prstGeom prst="ellipse">
             <a:avLst/>
           </a:prstGeom>
           <a:solidFill>
-            <a:srgbClr val="BCA98C"/>
+            <a:srgbClr val="EDEFE3"/>
           </a:solidFill>
           <a:ln>
             <a:noFill/>
@@ -6832,14 +7550,14 @@
         </p:nvSpPr>
         <p:spPr>
           <a:xfrm>
-            <a:off x="566928" y="530352"/>
-            <a:ext cx="54864" cy="438912"/>
+            <a:off x="0" y="0"/>
+            <a:ext cx="12191695" cy="457200"/>
           </a:xfrm>
           <a:prstGeom prst="rect">
             <a:avLst/>
           </a:prstGeom>
           <a:solidFill>
-            <a:srgbClr val="A6322A"/>
+            <a:srgbClr val="F7F2E8"/>
           </a:solidFill>
           <a:ln>
             <a:noFill/>
@@ -6870,14 +7588,109 @@
       </p:sp>
       <p:sp>
         <p:nvSpPr>
-          <p:cNvPr id="6" name="TextBox 5"/>
+          <p:cNvPr id="6" name="Rectangle 5"/>
+          <p:cNvSpPr/>
+          <p:nvPr/>
+        </p:nvSpPr>
+        <p:spPr>
+          <a:xfrm>
+            <a:off x="0" y="457200"/>
+            <a:ext cx="12191695" cy="12700"/>
+          </a:xfrm>
+          <a:prstGeom prst="rect">
+            <a:avLst/>
+          </a:prstGeom>
+          <a:solidFill>
+            <a:srgbClr val="9F5647"/>
+          </a:solidFill>
+          <a:ln>
+            <a:noFill/>
+          </a:ln>
+          <a:effectLst/>
+        </p:spPr>
+        <p:style>
+          <a:lnRef idx="1">
+            <a:schemeClr val="accent1"/>
+          </a:lnRef>
+          <a:fillRef idx="3">
+            <a:schemeClr val="accent1"/>
+          </a:fillRef>
+          <a:effectRef idx="2">
+            <a:schemeClr val="accent1"/>
+          </a:effectRef>
+          <a:fontRef idx="minor">
+            <a:schemeClr val="lt1"/>
+          </a:fontRef>
+        </p:style>
+        <p:txBody>
+          <a:bodyPr rtlCol="0" anchor="ctr"/>
+          <a:lstStyle/>
+          <a:p>
+            <a:pPr algn="ctr"/>
+          </a:p>
+        </p:txBody>
+      </p:sp>
+      <p:sp>
+        <p:nvSpPr>
+          <p:cNvPr id="7" name="TextBox 6"/>
           <p:cNvSpPr txBox="1"/>
           <p:nvPr/>
         </p:nvSpPr>
         <p:spPr>
           <a:xfrm>
-            <a:off x="777240" y="502920"/>
-            <a:ext cx="9631375" cy="502920"/>
+            <a:off x="548640" y="73152"/>
+            <a:ext cx="11094415" cy="329184"/>
+          </a:xfrm>
+          <a:prstGeom prst="rect">
+            <a:avLst/>
+          </a:prstGeom>
+          <a:noFill/>
+        </p:spPr>
+        <p:txBody>
+          <a:bodyPr wrap="square" anchor="t" lIns="54864" rIns="54864" tIns="0" bIns="0">
+            <a:spAutoFit/>
+          </a:bodyPr>
+          <a:lstStyle/>
+          <a:p>
+            <a:pPr algn="l">
+              <a:lnSpc>
+                <a:spcPct val="130000"/>
+              </a:lnSpc>
+              <a:defRPr sz="1300"/>
+            </a:pPr>
+            <a:r>
+              <a:rPr sz="1300" b="1" u="none">
+                <a:solidFill>
+                  <a:srgbClr val="C00000"/>
+                </a:solidFill>
+                <a:latin typeface="Times New Roman"/>
+                <a:ea typeface="Noto Serif CJK SC"/>
+              </a:rPr>
+              <a:t>温馨提示：</a:t>
+            </a:r>
+            <a:r>
+              <a:rPr sz="1300" b="0" u="none">
+                <a:solidFill>
+                  <a:srgbClr val="2B2620"/>
+                </a:solidFill>
+                <a:latin typeface="Times New Roman"/>
+                <a:ea typeface="Noto Serif CJK SC"/>
+              </a:rPr>
+              <a:t>一轮复习文言文《师说》</a:t>
+            </a:r>
+          </a:p>
+        </p:txBody>
+      </p:sp>
+      <p:sp>
+        <p:nvSpPr>
+          <p:cNvPr id="8" name="TextBox 7"/>
+          <p:cNvSpPr txBox="1"/>
+          <p:nvPr/>
+        </p:nvSpPr>
+        <p:spPr>
+          <a:xfrm>
+            <a:off x="548640" y="603504"/>
+            <a:ext cx="9265615" cy="713232"/>
           </a:xfrm>
           <a:prstGeom prst="rect">
             <a:avLst/>
@@ -6899,10 +7712,10 @@
             <a:r>
               <a:rPr sz="2800" b="1" u="none">
                 <a:solidFill>
-                  <a:srgbClr val="1C1B19"/>
-                </a:solidFill>
-                <a:latin typeface="Times New Roman"/>
-                <a:ea typeface="Noto Serif CJK SC"/>
+                  <a:srgbClr val="2B2620"/>
+                </a:solidFill>
+                <a:latin typeface="Times New Roman"/>
+                <a:ea typeface="Noto Sans CJK SC"/>
               </a:rPr>
               <a:t>三、特殊句式</a:t>
             </a:r>
@@ -6911,7 +7724,7 @@
       </p:sp>
       <p:sp>
         <p:nvSpPr>
-          <p:cNvPr id="7" name="TextBox 6"/>
+          <p:cNvPr id="9" name="TextBox 8"/>
           <p:cNvSpPr txBox="1"/>
           <p:nvPr/>
         </p:nvSpPr>
@@ -6940,7 +7753,7 @@
             <a:r>
               <a:rPr sz="2600" b="0" u="none">
                 <a:solidFill>
-                  <a:srgbClr val="A6322A"/>
+                  <a:srgbClr val="9F5647"/>
                 </a:solidFill>
                 <a:latin typeface="Times New Roman"/>
                 <a:ea typeface="Noto Serif CJK SC"/>
@@ -6950,7 +7763,7 @@
             <a:r>
               <a:rPr sz="2600" b="0" u="none">
                 <a:solidFill>
-                  <a:srgbClr val="23211E"/>
+                  <a:srgbClr val="2B2620"/>
                 </a:solidFill>
                 <a:latin typeface="Times New Roman"/>
                 <a:ea typeface="Noto Serif CJK SC"/>
@@ -6970,7 +7783,7 @@
             <a:r>
               <a:rPr sz="2600" b="0" u="none">
                 <a:solidFill>
-                  <a:srgbClr val="A6322A"/>
+                  <a:srgbClr val="9F5647"/>
                 </a:solidFill>
                 <a:latin typeface="Times New Roman"/>
                 <a:ea typeface="Noto Serif CJK SC"/>
@@ -6980,7 +7793,7 @@
             <a:r>
               <a:rPr sz="2600" b="0" u="none">
                 <a:solidFill>
-                  <a:srgbClr val="23211E"/>
+                  <a:srgbClr val="2B2620"/>
                 </a:solidFill>
                 <a:latin typeface="Times New Roman"/>
                 <a:ea typeface="Noto Serif CJK SC"/>
@@ -7000,7 +7813,7 @@
             <a:r>
               <a:rPr sz="2600" b="0" u="none">
                 <a:solidFill>
-                  <a:srgbClr val="A6322A"/>
+                  <a:srgbClr val="9F5647"/>
                 </a:solidFill>
                 <a:latin typeface="Times New Roman"/>
                 <a:ea typeface="Noto Serif CJK SC"/>
@@ -7010,7 +7823,7 @@
             <a:r>
               <a:rPr sz="2600" b="0" u="none">
                 <a:solidFill>
-                  <a:srgbClr val="23211E"/>
+                  <a:srgbClr val="2B2620"/>
                 </a:solidFill>
                 <a:latin typeface="Times New Roman"/>
                 <a:ea typeface="Noto Serif CJK SC"/>
@@ -7030,7 +7843,7 @@
             <a:r>
               <a:rPr sz="2600" b="0" u="none">
                 <a:solidFill>
-                  <a:srgbClr val="A6322A"/>
+                  <a:srgbClr val="9F5647"/>
                 </a:solidFill>
                 <a:latin typeface="Times New Roman"/>
                 <a:ea typeface="Noto Serif CJK SC"/>
@@ -7040,7 +7853,7 @@
             <a:r>
               <a:rPr sz="2600" b="0" u="none">
                 <a:solidFill>
-                  <a:srgbClr val="23211E"/>
+                  <a:srgbClr val="2B2620"/>
                 </a:solidFill>
                 <a:latin typeface="Times New Roman"/>
                 <a:ea typeface="Noto Serif CJK SC"/>
@@ -7052,7 +7865,7 @@
       </p:sp>
       <p:sp>
         <p:nvSpPr>
-          <p:cNvPr id="8" name="Rectangle 7"/>
+          <p:cNvPr id="10" name="Rectangle 9"/>
           <p:cNvSpPr/>
           <p:nvPr/>
         </p:nvSpPr>
@@ -7065,7 +7878,7 @@
             <a:avLst/>
           </a:prstGeom>
           <a:solidFill>
-            <a:srgbClr val="A6322A"/>
+            <a:srgbClr val="9F5647"/>
           </a:solidFill>
           <a:ln>
             <a:noFill/>
@@ -7096,14 +7909,14 @@
       </p:sp>
       <p:sp>
         <p:nvSpPr>
-          <p:cNvPr id="9" name="TextBox 8"/>
+          <p:cNvPr id="11" name="TextBox 10"/>
           <p:cNvSpPr txBox="1"/>
           <p:nvPr/>
         </p:nvSpPr>
         <p:spPr>
           <a:xfrm>
             <a:off x="548640" y="6345936"/>
-            <a:ext cx="8595360" cy="274320"/>
+            <a:ext cx="7498079" cy="274320"/>
           </a:xfrm>
           <a:prstGeom prst="rect">
             <a:avLst/>
@@ -7137,7 +7950,7 @@
       </p:sp>
       <p:sp>
         <p:nvSpPr>
-          <p:cNvPr id="10" name="TextBox 9"/>
+          <p:cNvPr id="12" name="TextBox 11"/>
           <p:cNvSpPr txBox="1"/>
           <p:nvPr/>
         </p:nvSpPr>
@@ -7196,20 +8009,20 @@
       <p:grpSpPr/>
       <p:sp>
         <p:nvSpPr>
-          <p:cNvPr id="2" name="Rectangle 1"/>
+          <p:cNvPr id="2" name="Oval 1"/>
           <p:cNvSpPr/>
           <p:nvPr/>
         </p:nvSpPr>
         <p:spPr>
-          <a:xfrm>
-            <a:off x="11688775" y="457200"/>
-            <a:ext cx="73152" cy="1463040"/>
-          </a:xfrm>
-          <a:prstGeom prst="rect">
+          <a:xfrm rot="19920000">
+            <a:off x="11018520" y="201168"/>
+            <a:ext cx="777240" cy="310896"/>
+          </a:xfrm>
+          <a:prstGeom prst="ellipse">
             <a:avLst/>
           </a:prstGeom>
           <a:solidFill>
-            <a:srgbClr val="D9CDB8"/>
+            <a:srgbClr val="EDEFE3"/>
           </a:solidFill>
           <a:ln>
             <a:noFill/>
@@ -7240,20 +8053,20 @@
       </p:sp>
       <p:sp>
         <p:nvSpPr>
-          <p:cNvPr id="3" name="Rectangle 2"/>
+          <p:cNvPr id="3" name="Oval 2"/>
           <p:cNvSpPr/>
           <p:nvPr/>
         </p:nvSpPr>
         <p:spPr>
-          <a:xfrm>
-            <a:off x="0" y="365760"/>
-            <a:ext cx="12191695" cy="12700"/>
-          </a:xfrm>
-          <a:prstGeom prst="rect">
+          <a:xfrm rot="720000">
+            <a:off x="11475720" y="502920"/>
+            <a:ext cx="640080" cy="256032"/>
+          </a:xfrm>
+          <a:prstGeom prst="ellipse">
             <a:avLst/>
           </a:prstGeom>
           <a:solidFill>
-            <a:srgbClr val="BCA98C"/>
+            <a:srgbClr val="EDEFE3"/>
           </a:solidFill>
           <a:ln>
             <a:noFill/>
@@ -7284,20 +8097,20 @@
       </p:sp>
       <p:sp>
         <p:nvSpPr>
-          <p:cNvPr id="4" name="Rectangle 3"/>
+          <p:cNvPr id="4" name="Oval 3"/>
           <p:cNvSpPr/>
           <p:nvPr/>
         </p:nvSpPr>
         <p:spPr>
-          <a:xfrm>
-            <a:off x="0" y="1133856"/>
-            <a:ext cx="12191695" cy="12700"/>
-          </a:xfrm>
-          <a:prstGeom prst="rect">
+          <a:xfrm rot="21120000">
+            <a:off x="10835640" y="658368"/>
+            <a:ext cx="566928" cy="219456"/>
+          </a:xfrm>
+          <a:prstGeom prst="ellipse">
             <a:avLst/>
           </a:prstGeom>
           <a:solidFill>
-            <a:srgbClr val="BCA98C"/>
+            <a:srgbClr val="EDEFE3"/>
           </a:solidFill>
           <a:ln>
             <a:noFill/>
@@ -7334,14 +8147,14 @@
         </p:nvSpPr>
         <p:spPr>
           <a:xfrm>
-            <a:off x="566928" y="530352"/>
-            <a:ext cx="54864" cy="438912"/>
+            <a:off x="0" y="0"/>
+            <a:ext cx="12191695" cy="457200"/>
           </a:xfrm>
           <a:prstGeom prst="rect">
             <a:avLst/>
           </a:prstGeom>
           <a:solidFill>
-            <a:srgbClr val="A6322A"/>
+            <a:srgbClr val="F7F2E8"/>
           </a:solidFill>
           <a:ln>
             <a:noFill/>
@@ -7372,14 +8185,109 @@
       </p:sp>
       <p:sp>
         <p:nvSpPr>
-          <p:cNvPr id="6" name="TextBox 5"/>
+          <p:cNvPr id="6" name="Rectangle 5"/>
+          <p:cNvSpPr/>
+          <p:nvPr/>
+        </p:nvSpPr>
+        <p:spPr>
+          <a:xfrm>
+            <a:off x="0" y="457200"/>
+            <a:ext cx="12191695" cy="12700"/>
+          </a:xfrm>
+          <a:prstGeom prst="rect">
+            <a:avLst/>
+          </a:prstGeom>
+          <a:solidFill>
+            <a:srgbClr val="9F5647"/>
+          </a:solidFill>
+          <a:ln>
+            <a:noFill/>
+          </a:ln>
+          <a:effectLst/>
+        </p:spPr>
+        <p:style>
+          <a:lnRef idx="1">
+            <a:schemeClr val="accent1"/>
+          </a:lnRef>
+          <a:fillRef idx="3">
+            <a:schemeClr val="accent1"/>
+          </a:fillRef>
+          <a:effectRef idx="2">
+            <a:schemeClr val="accent1"/>
+          </a:effectRef>
+          <a:fontRef idx="minor">
+            <a:schemeClr val="lt1"/>
+          </a:fontRef>
+        </p:style>
+        <p:txBody>
+          <a:bodyPr rtlCol="0" anchor="ctr"/>
+          <a:lstStyle/>
+          <a:p>
+            <a:pPr algn="ctr"/>
+          </a:p>
+        </p:txBody>
+      </p:sp>
+      <p:sp>
+        <p:nvSpPr>
+          <p:cNvPr id="7" name="TextBox 6"/>
           <p:cNvSpPr txBox="1"/>
           <p:nvPr/>
         </p:nvSpPr>
         <p:spPr>
           <a:xfrm>
-            <a:off x="777240" y="502920"/>
-            <a:ext cx="9631375" cy="502920"/>
+            <a:off x="548640" y="73152"/>
+            <a:ext cx="11094415" cy="329184"/>
+          </a:xfrm>
+          <a:prstGeom prst="rect">
+            <a:avLst/>
+          </a:prstGeom>
+          <a:noFill/>
+        </p:spPr>
+        <p:txBody>
+          <a:bodyPr wrap="square" anchor="t" lIns="54864" rIns="54864" tIns="0" bIns="0">
+            <a:spAutoFit/>
+          </a:bodyPr>
+          <a:lstStyle/>
+          <a:p>
+            <a:pPr algn="l">
+              <a:lnSpc>
+                <a:spcPct val="130000"/>
+              </a:lnSpc>
+              <a:defRPr sz="1300"/>
+            </a:pPr>
+            <a:r>
+              <a:rPr sz="1300" b="1" u="none">
+                <a:solidFill>
+                  <a:srgbClr val="C00000"/>
+                </a:solidFill>
+                <a:latin typeface="Times New Roman"/>
+                <a:ea typeface="Noto Serif CJK SC"/>
+              </a:rPr>
+              <a:t>温馨提示：</a:t>
+            </a:r>
+            <a:r>
+              <a:rPr sz="1300" b="0" u="none">
+                <a:solidFill>
+                  <a:srgbClr val="2B2620"/>
+                </a:solidFill>
+                <a:latin typeface="Times New Roman"/>
+                <a:ea typeface="Noto Serif CJK SC"/>
+              </a:rPr>
+              <a:t>原文</a:t>
+            </a:r>
+          </a:p>
+        </p:txBody>
+      </p:sp>
+      <p:sp>
+        <p:nvSpPr>
+          <p:cNvPr id="8" name="TextBox 7"/>
+          <p:cNvSpPr txBox="1"/>
+          <p:nvPr/>
+        </p:nvSpPr>
+        <p:spPr>
+          <a:xfrm>
+            <a:off x="548640" y="603504"/>
+            <a:ext cx="9265615" cy="713232"/>
           </a:xfrm>
           <a:prstGeom prst="rect">
             <a:avLst/>
@@ -7401,10 +8309,10 @@
             <a:r>
               <a:rPr sz="2800" b="1" u="none">
                 <a:solidFill>
-                  <a:srgbClr val="1C1B19"/>
-                </a:solidFill>
-                <a:latin typeface="Times New Roman"/>
-                <a:ea typeface="Noto Serif CJK SC"/>
+                  <a:srgbClr val="2B2620"/>
+                </a:solidFill>
+                <a:latin typeface="Times New Roman"/>
+                <a:ea typeface="Noto Sans CJK SC"/>
               </a:rPr>
               <a:t>三、特殊句式｜引文</a:t>
             </a:r>
@@ -7413,14 +8321,143 @@
       </p:sp>
       <p:sp>
         <p:nvSpPr>
-          <p:cNvPr id="7" name="TextBox 6"/>
+          <p:cNvPr id="9" name="Rectangle 8"/>
+          <p:cNvSpPr/>
+          <p:nvPr/>
+        </p:nvSpPr>
+        <p:spPr>
+          <a:xfrm>
+            <a:off x="822960" y="1463040"/>
+            <a:ext cx="10545775" cy="4206240"/>
+          </a:xfrm>
+          <a:prstGeom prst="rect">
+            <a:avLst/>
+          </a:prstGeom>
+          <a:solidFill>
+            <a:srgbClr val="F7F2E8"/>
+          </a:solidFill>
+          <a:ln>
+            <a:noFill/>
+          </a:ln>
+          <a:effectLst/>
+        </p:spPr>
+        <p:style>
+          <a:lnRef idx="1">
+            <a:schemeClr val="accent1"/>
+          </a:lnRef>
+          <a:fillRef idx="3">
+            <a:schemeClr val="accent1"/>
+          </a:fillRef>
+          <a:effectRef idx="2">
+            <a:schemeClr val="accent1"/>
+          </a:effectRef>
+          <a:fontRef idx="minor">
+            <a:schemeClr val="lt1"/>
+          </a:fontRef>
+        </p:style>
+        <p:txBody>
+          <a:bodyPr rtlCol="0" anchor="ctr"/>
+          <a:lstStyle/>
+          <a:p>
+            <a:pPr algn="ctr"/>
+          </a:p>
+        </p:txBody>
+      </p:sp>
+      <p:sp>
+        <p:nvSpPr>
+          <p:cNvPr id="10" name="Rectangle 9"/>
+          <p:cNvSpPr/>
+          <p:nvPr/>
+        </p:nvSpPr>
+        <p:spPr>
+          <a:xfrm>
+            <a:off x="822960" y="1463040"/>
+            <a:ext cx="73152" cy="4206240"/>
+          </a:xfrm>
+          <a:prstGeom prst="rect">
+            <a:avLst/>
+          </a:prstGeom>
+          <a:solidFill>
+            <a:srgbClr val="9F5647"/>
+          </a:solidFill>
+          <a:ln>
+            <a:noFill/>
+          </a:ln>
+          <a:effectLst/>
+        </p:spPr>
+        <p:style>
+          <a:lnRef idx="1">
+            <a:schemeClr val="accent1"/>
+          </a:lnRef>
+          <a:fillRef idx="3">
+            <a:schemeClr val="accent1"/>
+          </a:fillRef>
+          <a:effectRef idx="2">
+            <a:schemeClr val="accent1"/>
+          </a:effectRef>
+          <a:fontRef idx="minor">
+            <a:schemeClr val="lt1"/>
+          </a:fontRef>
+        </p:style>
+        <p:txBody>
+          <a:bodyPr rtlCol="0" anchor="ctr"/>
+          <a:lstStyle/>
+          <a:p>
+            <a:pPr algn="ctr"/>
+          </a:p>
+        </p:txBody>
+      </p:sp>
+      <p:sp>
+        <p:nvSpPr>
+          <p:cNvPr id="11" name="TextBox 10"/>
           <p:cNvSpPr txBox="1"/>
           <p:nvPr/>
         </p:nvSpPr>
         <p:spPr>
           <a:xfrm>
-            <a:off x="8899855" y="566928"/>
-            <a:ext cx="2743200" cy="365760"/>
+            <a:off x="1234440" y="1600200"/>
+            <a:ext cx="9539935" cy="3931920"/>
+          </a:xfrm>
+          <a:prstGeom prst="rect">
+            <a:avLst/>
+          </a:prstGeom>
+          <a:noFill/>
+        </p:spPr>
+        <p:txBody>
+          <a:bodyPr wrap="square" anchor="ctr" lIns="54864" rIns="54864" tIns="0" bIns="0">
+            <a:spAutoFit/>
+          </a:bodyPr>
+          <a:lstStyle/>
+          <a:p>
+            <a:pPr algn="l">
+              <a:lnSpc>
+                <a:spcPct val="185000"/>
+              </a:lnSpc>
+              <a:defRPr sz="2600"/>
+            </a:pPr>
+            <a:r>
+              <a:rPr sz="2600" b="0" u="none">
+                <a:solidFill>
+                  <a:srgbClr val="2B2620"/>
+                </a:solidFill>
+                <a:latin typeface="Times New Roman"/>
+                <a:ea typeface="Noto Serif CJK SC"/>
+              </a:rPr>
+              <a:t>师者，所以传道受业解惑也。……道之所存，师之所存也。（节选）</a:t>
+            </a:r>
+          </a:p>
+        </p:txBody>
+      </p:sp>
+      <p:sp>
+        <p:nvSpPr>
+          <p:cNvPr id="12" name="TextBox 11"/>
+          <p:cNvSpPr txBox="1"/>
+          <p:nvPr/>
+        </p:nvSpPr>
+        <p:spPr>
+          <a:xfrm>
+            <a:off x="1188720" y="5440680"/>
+            <a:ext cx="9082735" cy="365760"/>
           </a:xfrm>
           <a:prstGeom prst="rect">
             <a:avLst/>
@@ -7442,32 +8479,32 @@
             <a:r>
               <a:rPr sz="1300" b="0" u="none">
                 <a:solidFill>
-                  <a:srgbClr val="A6322A"/>
-                </a:solidFill>
-                <a:latin typeface="Times New Roman"/>
-                <a:ea typeface="Noto Serif CJK SC"/>
-              </a:rPr>
-              <a:t>—— 原文</a:t>
-            </a:r>
-          </a:p>
-        </p:txBody>
-      </p:sp>
-      <p:sp>
-        <p:nvSpPr>
-          <p:cNvPr id="8" name="Rectangle 7"/>
+                  <a:srgbClr val="6B6257"/>
+                </a:solidFill>
+                <a:latin typeface="Times New Roman"/>
+                <a:ea typeface="Noto Sans CJK SC"/>
+              </a:rPr>
+              <a:t>—— 韩愈《师说》</a:t>
+            </a:r>
+          </a:p>
+        </p:txBody>
+      </p:sp>
+      <p:sp>
+        <p:nvSpPr>
+          <p:cNvPr id="13" name="Rectangle 12"/>
           <p:cNvSpPr/>
           <p:nvPr/>
         </p:nvSpPr>
         <p:spPr>
           <a:xfrm>
-            <a:off x="822960" y="1463040"/>
-            <a:ext cx="10545775" cy="4206240"/>
+            <a:off x="0" y="6739128"/>
+            <a:ext cx="12191695" cy="118872"/>
           </a:xfrm>
           <a:prstGeom prst="rect">
             <a:avLst/>
           </a:prstGeom>
           <a:solidFill>
-            <a:srgbClr val="F3EDE3"/>
+            <a:srgbClr val="9F5647"/>
           </a:solidFill>
           <a:ln>
             <a:noFill/>
@@ -7498,184 +8535,14 @@
       </p:sp>
       <p:sp>
         <p:nvSpPr>
-          <p:cNvPr id="9" name="Rectangle 8"/>
-          <p:cNvSpPr/>
-          <p:nvPr/>
-        </p:nvSpPr>
-        <p:spPr>
-          <a:xfrm>
-            <a:off x="822960" y="1463040"/>
-            <a:ext cx="73152" cy="4206240"/>
-          </a:xfrm>
-          <a:prstGeom prst="rect">
-            <a:avLst/>
-          </a:prstGeom>
-          <a:solidFill>
-            <a:srgbClr val="A6322A"/>
-          </a:solidFill>
-          <a:ln>
-            <a:noFill/>
-          </a:ln>
-          <a:effectLst/>
-        </p:spPr>
-        <p:style>
-          <a:lnRef idx="1">
-            <a:schemeClr val="accent1"/>
-          </a:lnRef>
-          <a:fillRef idx="3">
-            <a:schemeClr val="accent1"/>
-          </a:fillRef>
-          <a:effectRef idx="2">
-            <a:schemeClr val="accent1"/>
-          </a:effectRef>
-          <a:fontRef idx="minor">
-            <a:schemeClr val="lt1"/>
-          </a:fontRef>
-        </p:style>
-        <p:txBody>
-          <a:bodyPr rtlCol="0" anchor="ctr"/>
-          <a:lstStyle/>
-          <a:p>
-            <a:pPr algn="ctr"/>
-          </a:p>
-        </p:txBody>
-      </p:sp>
-      <p:sp>
-        <p:nvSpPr>
-          <p:cNvPr id="10" name="TextBox 9"/>
+          <p:cNvPr id="14" name="TextBox 13"/>
           <p:cNvSpPr txBox="1"/>
           <p:nvPr/>
         </p:nvSpPr>
         <p:spPr>
           <a:xfrm>
-            <a:off x="1234440" y="1600200"/>
-            <a:ext cx="9539935" cy="3931920"/>
-          </a:xfrm>
-          <a:prstGeom prst="rect">
-            <a:avLst/>
-          </a:prstGeom>
-          <a:noFill/>
-        </p:spPr>
-        <p:txBody>
-          <a:bodyPr wrap="square" anchor="ctr" lIns="54864" rIns="54864" tIns="0" bIns="0">
-            <a:spAutoFit/>
-          </a:bodyPr>
-          <a:lstStyle/>
-          <a:p>
-            <a:pPr algn="l">
-              <a:lnSpc>
-                <a:spcPct val="185000"/>
-              </a:lnSpc>
-              <a:defRPr sz="2600"/>
-            </a:pPr>
-            <a:r>
-              <a:rPr sz="2600" b="0" u="none">
-                <a:solidFill>
-                  <a:srgbClr val="23211E"/>
-                </a:solidFill>
-                <a:latin typeface="Times New Roman"/>
-                <a:ea typeface="Noto Serif CJK SC"/>
-              </a:rPr>
-              <a:t>师者，所以传道受业解惑也。……道之所存，师之所存也。（节选）</a:t>
-            </a:r>
-          </a:p>
-        </p:txBody>
-      </p:sp>
-      <p:sp>
-        <p:nvSpPr>
-          <p:cNvPr id="11" name="TextBox 10"/>
-          <p:cNvSpPr txBox="1"/>
-          <p:nvPr/>
-        </p:nvSpPr>
-        <p:spPr>
-          <a:xfrm>
-            <a:off x="1188720" y="5440680"/>
-            <a:ext cx="9082735" cy="365760"/>
-          </a:xfrm>
-          <a:prstGeom prst="rect">
-            <a:avLst/>
-          </a:prstGeom>
-          <a:noFill/>
-        </p:spPr>
-        <p:txBody>
-          <a:bodyPr wrap="square" anchor="t" lIns="54864" rIns="54864" tIns="0" bIns="0">
-            <a:spAutoFit/>
-          </a:bodyPr>
-          <a:lstStyle/>
-          <a:p>
-            <a:pPr algn="r">
-              <a:lnSpc>
-                <a:spcPct val="130000"/>
-              </a:lnSpc>
-              <a:defRPr sz="1300"/>
-            </a:pPr>
-            <a:r>
-              <a:rPr sz="1300" b="0" u="none">
-                <a:solidFill>
-                  <a:srgbClr val="6B6257"/>
-                </a:solidFill>
-                <a:latin typeface="Times New Roman"/>
-                <a:ea typeface="Noto Serif CJK SC"/>
-              </a:rPr>
-              <a:t>—— 韩愈《师说》</a:t>
-            </a:r>
-          </a:p>
-        </p:txBody>
-      </p:sp>
-      <p:sp>
-        <p:nvSpPr>
-          <p:cNvPr id="12" name="Rectangle 11"/>
-          <p:cNvSpPr/>
-          <p:nvPr/>
-        </p:nvSpPr>
-        <p:spPr>
-          <a:xfrm>
-            <a:off x="0" y="6739128"/>
-            <a:ext cx="12191695" cy="118872"/>
-          </a:xfrm>
-          <a:prstGeom prst="rect">
-            <a:avLst/>
-          </a:prstGeom>
-          <a:solidFill>
-            <a:srgbClr val="A6322A"/>
-          </a:solidFill>
-          <a:ln>
-            <a:noFill/>
-          </a:ln>
-          <a:effectLst/>
-        </p:spPr>
-        <p:style>
-          <a:lnRef idx="1">
-            <a:schemeClr val="accent1"/>
-          </a:lnRef>
-          <a:fillRef idx="3">
-            <a:schemeClr val="accent1"/>
-          </a:fillRef>
-          <a:effectRef idx="2">
-            <a:schemeClr val="accent1"/>
-          </a:effectRef>
-          <a:fontRef idx="minor">
-            <a:schemeClr val="lt1"/>
-          </a:fontRef>
-        </p:style>
-        <p:txBody>
-          <a:bodyPr rtlCol="0" anchor="ctr"/>
-          <a:lstStyle/>
-          <a:p>
-            <a:pPr algn="ctr"/>
-          </a:p>
-        </p:txBody>
-      </p:sp>
-      <p:sp>
-        <p:nvSpPr>
-          <p:cNvPr id="13" name="TextBox 12"/>
-          <p:cNvSpPr txBox="1"/>
-          <p:nvPr/>
-        </p:nvSpPr>
-        <p:spPr>
-          <a:xfrm>
             <a:off x="548640" y="6345936"/>
-            <a:ext cx="8595360" cy="274320"/>
+            <a:ext cx="7498079" cy="274320"/>
           </a:xfrm>
           <a:prstGeom prst="rect">
             <a:avLst/>
@@ -7709,7 +8576,7 @@
       </p:sp>
       <p:sp>
         <p:nvSpPr>
-          <p:cNvPr id="14" name="TextBox 13"/>
+          <p:cNvPr id="15" name="TextBox 14"/>
           <p:cNvSpPr txBox="1"/>
           <p:nvPr/>
         </p:nvSpPr>
@@ -7768,20 +8635,20 @@
       <p:grpSpPr/>
       <p:sp>
         <p:nvSpPr>
-          <p:cNvPr id="2" name="Rectangle 1"/>
+          <p:cNvPr id="2" name="Oval 1"/>
           <p:cNvSpPr/>
           <p:nvPr/>
         </p:nvSpPr>
         <p:spPr>
-          <a:xfrm>
-            <a:off x="11688775" y="457200"/>
-            <a:ext cx="73152" cy="1463040"/>
-          </a:xfrm>
-          <a:prstGeom prst="rect">
+          <a:xfrm rot="19920000">
+            <a:off x="11018520" y="201168"/>
+            <a:ext cx="777240" cy="310896"/>
+          </a:xfrm>
+          <a:prstGeom prst="ellipse">
             <a:avLst/>
           </a:prstGeom>
           <a:solidFill>
-            <a:srgbClr val="D9CDB8"/>
+            <a:srgbClr val="EDEFE3"/>
           </a:solidFill>
           <a:ln>
             <a:noFill/>
@@ -7812,20 +8679,20 @@
       </p:sp>
       <p:sp>
         <p:nvSpPr>
-          <p:cNvPr id="3" name="Rectangle 2"/>
+          <p:cNvPr id="3" name="Oval 2"/>
           <p:cNvSpPr/>
           <p:nvPr/>
         </p:nvSpPr>
         <p:spPr>
-          <a:xfrm>
-            <a:off x="0" y="365760"/>
-            <a:ext cx="12191695" cy="12700"/>
-          </a:xfrm>
-          <a:prstGeom prst="rect">
+          <a:xfrm rot="720000">
+            <a:off x="11475720" y="502920"/>
+            <a:ext cx="640080" cy="256032"/>
+          </a:xfrm>
+          <a:prstGeom prst="ellipse">
             <a:avLst/>
           </a:prstGeom>
           <a:solidFill>
-            <a:srgbClr val="BCA98C"/>
+            <a:srgbClr val="EDEFE3"/>
           </a:solidFill>
           <a:ln>
             <a:noFill/>
@@ -7856,20 +8723,20 @@
       </p:sp>
       <p:sp>
         <p:nvSpPr>
-          <p:cNvPr id="4" name="Rectangle 3"/>
+          <p:cNvPr id="4" name="Oval 3"/>
           <p:cNvSpPr/>
           <p:nvPr/>
         </p:nvSpPr>
         <p:spPr>
-          <a:xfrm>
-            <a:off x="0" y="1133856"/>
-            <a:ext cx="12191695" cy="12700"/>
-          </a:xfrm>
-          <a:prstGeom prst="rect">
+          <a:xfrm rot="21120000">
+            <a:off x="10835640" y="658368"/>
+            <a:ext cx="566928" cy="219456"/>
+          </a:xfrm>
+          <a:prstGeom prst="ellipse">
             <a:avLst/>
           </a:prstGeom>
           <a:solidFill>
-            <a:srgbClr val="BCA98C"/>
+            <a:srgbClr val="EDEFE3"/>
           </a:solidFill>
           <a:ln>
             <a:noFill/>
@@ -7906,14 +8773,14 @@
         </p:nvSpPr>
         <p:spPr>
           <a:xfrm>
-            <a:off x="566928" y="530352"/>
-            <a:ext cx="54864" cy="438912"/>
+            <a:off x="0" y="0"/>
+            <a:ext cx="12191695" cy="457200"/>
           </a:xfrm>
           <a:prstGeom prst="rect">
             <a:avLst/>
           </a:prstGeom>
           <a:solidFill>
-            <a:srgbClr val="A6322A"/>
+            <a:srgbClr val="F7F2E8"/>
           </a:solidFill>
           <a:ln>
             <a:noFill/>
@@ -7944,14 +8811,109 @@
       </p:sp>
       <p:sp>
         <p:nvSpPr>
-          <p:cNvPr id="6" name="TextBox 5"/>
+          <p:cNvPr id="6" name="Rectangle 5"/>
+          <p:cNvSpPr/>
+          <p:nvPr/>
+        </p:nvSpPr>
+        <p:spPr>
+          <a:xfrm>
+            <a:off x="0" y="457200"/>
+            <a:ext cx="12191695" cy="12700"/>
+          </a:xfrm>
+          <a:prstGeom prst="rect">
+            <a:avLst/>
+          </a:prstGeom>
+          <a:solidFill>
+            <a:srgbClr val="9F5647"/>
+          </a:solidFill>
+          <a:ln>
+            <a:noFill/>
+          </a:ln>
+          <a:effectLst/>
+        </p:spPr>
+        <p:style>
+          <a:lnRef idx="1">
+            <a:schemeClr val="accent1"/>
+          </a:lnRef>
+          <a:fillRef idx="3">
+            <a:schemeClr val="accent1"/>
+          </a:fillRef>
+          <a:effectRef idx="2">
+            <a:schemeClr val="accent1"/>
+          </a:effectRef>
+          <a:fontRef idx="minor">
+            <a:schemeClr val="lt1"/>
+          </a:fontRef>
+        </p:style>
+        <p:txBody>
+          <a:bodyPr rtlCol="0" anchor="ctr"/>
+          <a:lstStyle/>
+          <a:p>
+            <a:pPr algn="ctr"/>
+          </a:p>
+        </p:txBody>
+      </p:sp>
+      <p:sp>
+        <p:nvSpPr>
+          <p:cNvPr id="7" name="TextBox 6"/>
           <p:cNvSpPr txBox="1"/>
           <p:nvPr/>
         </p:nvSpPr>
         <p:spPr>
           <a:xfrm>
-            <a:off x="777240" y="502920"/>
-            <a:ext cx="9631375" cy="502920"/>
+            <a:off x="548640" y="73152"/>
+            <a:ext cx="11094415" cy="329184"/>
+          </a:xfrm>
+          <a:prstGeom prst="rect">
+            <a:avLst/>
+          </a:prstGeom>
+          <a:noFill/>
+        </p:spPr>
+        <p:txBody>
+          <a:bodyPr wrap="square" anchor="t" lIns="54864" rIns="54864" tIns="0" bIns="0">
+            <a:spAutoFit/>
+          </a:bodyPr>
+          <a:lstStyle/>
+          <a:p>
+            <a:pPr algn="l">
+              <a:lnSpc>
+                <a:spcPct val="130000"/>
+              </a:lnSpc>
+              <a:defRPr sz="1300"/>
+            </a:pPr>
+            <a:r>
+              <a:rPr sz="1300" b="1" u="none">
+                <a:solidFill>
+                  <a:srgbClr val="C00000"/>
+                </a:solidFill>
+                <a:latin typeface="Times New Roman"/>
+                <a:ea typeface="Noto Serif CJK SC"/>
+              </a:rPr>
+              <a:t>温馨提示：</a:t>
+            </a:r>
+            <a:r>
+              <a:rPr sz="1300" b="0" u="none">
+                <a:solidFill>
+                  <a:srgbClr val="2B2620"/>
+                </a:solidFill>
+                <a:latin typeface="Times New Roman"/>
+                <a:ea typeface="Noto Serif CJK SC"/>
+              </a:rPr>
+              <a:t>归纳</a:t>
+            </a:r>
+          </a:p>
+        </p:txBody>
+      </p:sp>
+      <p:sp>
+        <p:nvSpPr>
+          <p:cNvPr id="8" name="TextBox 7"/>
+          <p:cNvSpPr txBox="1"/>
+          <p:nvPr/>
+        </p:nvSpPr>
+        <p:spPr>
+          <a:xfrm>
+            <a:off x="548640" y="603504"/>
+            <a:ext cx="9265615" cy="713232"/>
           </a:xfrm>
           <a:prstGeom prst="rect">
             <a:avLst/>
@@ -7973,10 +8935,10 @@
             <a:r>
               <a:rPr sz="2800" b="1" u="none">
                 <a:solidFill>
-                  <a:srgbClr val="1C1B19"/>
-                </a:solidFill>
-                <a:latin typeface="Times New Roman"/>
-                <a:ea typeface="Noto Serif CJK SC"/>
+                  <a:srgbClr val="2B2620"/>
+                </a:solidFill>
+                <a:latin typeface="Times New Roman"/>
+                <a:ea typeface="Noto Sans CJK SC"/>
               </a:rPr>
               <a:t>四、论证结构｜概念</a:t>
             </a:r>
@@ -7985,48 +8947,7 @@
       </p:sp>
       <p:sp>
         <p:nvSpPr>
-          <p:cNvPr id="7" name="TextBox 6"/>
-          <p:cNvSpPr txBox="1"/>
-          <p:nvPr/>
-        </p:nvSpPr>
-        <p:spPr>
-          <a:xfrm>
-            <a:off x="8899855" y="566928"/>
-            <a:ext cx="2743200" cy="365760"/>
-          </a:xfrm>
-          <a:prstGeom prst="rect">
-            <a:avLst/>
-          </a:prstGeom>
-          <a:noFill/>
-        </p:spPr>
-        <p:txBody>
-          <a:bodyPr wrap="square" anchor="t" lIns="54864" rIns="54864" tIns="0" bIns="0">
-            <a:spAutoFit/>
-          </a:bodyPr>
-          <a:lstStyle/>
-          <a:p>
-            <a:pPr algn="r">
-              <a:lnSpc>
-                <a:spcPct val="130000"/>
-              </a:lnSpc>
-              <a:defRPr sz="1300"/>
-            </a:pPr>
-            <a:r>
-              <a:rPr sz="1300" b="0" u="none">
-                <a:solidFill>
-                  <a:srgbClr val="A6322A"/>
-                </a:solidFill>
-                <a:latin typeface="Times New Roman"/>
-                <a:ea typeface="Noto Serif CJK SC"/>
-              </a:rPr>
-              <a:t>—— 归纳</a:t>
-            </a:r>
-          </a:p>
-        </p:txBody>
-      </p:sp>
-      <p:sp>
-        <p:nvSpPr>
-          <p:cNvPr id="8" name="Rounded Rectangle 7"/>
+          <p:cNvPr id="9" name="Rounded Rectangle 8"/>
           <p:cNvSpPr/>
           <p:nvPr/>
         </p:nvSpPr>
@@ -8041,7 +8962,7 @@
             </a:avLst>
           </a:prstGeom>
           <a:solidFill>
-            <a:srgbClr val="1C1B19"/>
+            <a:srgbClr val="3B3226"/>
           </a:solidFill>
           <a:ln>
             <a:noFill/>
@@ -8072,7 +8993,7 @@
       </p:sp>
       <p:sp>
         <p:nvSpPr>
-          <p:cNvPr id="9" name="TextBox 8"/>
+          <p:cNvPr id="10" name="TextBox 9"/>
           <p:cNvSpPr txBox="1"/>
           <p:nvPr/>
         </p:nvSpPr>
@@ -8113,7 +9034,7 @@
       </p:sp>
       <p:sp>
         <p:nvSpPr>
-          <p:cNvPr id="10" name="Rectangle 9"/>
+          <p:cNvPr id="11" name="Rectangle 10"/>
           <p:cNvSpPr/>
           <p:nvPr/>
         </p:nvSpPr>
@@ -8126,7 +9047,7 @@
             <a:avLst/>
           </a:prstGeom>
           <a:solidFill>
-            <a:srgbClr val="A6322A"/>
+            <a:srgbClr val="9F5647"/>
           </a:solidFill>
           <a:ln>
             <a:noFill/>
@@ -8157,7 +9078,7 @@
       </p:sp>
       <p:sp>
         <p:nvSpPr>
-          <p:cNvPr id="11" name="Rectangle 10"/>
+          <p:cNvPr id="12" name="Rectangle 11"/>
           <p:cNvSpPr/>
           <p:nvPr/>
         </p:nvSpPr>
@@ -8170,7 +9091,7 @@
             <a:avLst/>
           </a:prstGeom>
           <a:solidFill>
-            <a:srgbClr val="A6322A"/>
+            <a:srgbClr val="9F5647"/>
           </a:solidFill>
           <a:ln>
             <a:noFill/>
@@ -8201,7 +9122,7 @@
       </p:sp>
       <p:sp>
         <p:nvSpPr>
-          <p:cNvPr id="12" name="Rectangle 11"/>
+          <p:cNvPr id="13" name="Rectangle 12"/>
           <p:cNvSpPr/>
           <p:nvPr/>
         </p:nvSpPr>
@@ -8214,7 +9135,7 @@
             <a:avLst/>
           </a:prstGeom>
           <a:solidFill>
-            <a:srgbClr val="A6322A"/>
+            <a:srgbClr val="9F5647"/>
           </a:solidFill>
           <a:ln>
             <a:noFill/>
@@ -8245,7 +9166,7 @@
       </p:sp>
       <p:sp>
         <p:nvSpPr>
-          <p:cNvPr id="13" name="Rounded Rectangle 12"/>
+          <p:cNvPr id="14" name="Rounded Rectangle 13"/>
           <p:cNvSpPr/>
           <p:nvPr/>
         </p:nvSpPr>
@@ -8260,7 +9181,7 @@
             </a:avLst>
           </a:prstGeom>
           <a:solidFill>
-            <a:srgbClr val="F3EDE3"/>
+            <a:srgbClr val="F7F2E8"/>
           </a:solidFill>
           <a:ln>
             <a:noFill/>
@@ -8291,7 +9212,7 @@
       </p:sp>
       <p:sp>
         <p:nvSpPr>
-          <p:cNvPr id="14" name="TextBox 13"/>
+          <p:cNvPr id="15" name="TextBox 14"/>
           <p:cNvSpPr txBox="1"/>
           <p:nvPr/>
         </p:nvSpPr>
@@ -8320,7 +9241,7 @@
             <a:r>
               <a:rPr sz="1500" b="1" u="none">
                 <a:solidFill>
-                  <a:srgbClr val="1C1B19"/>
+                  <a:srgbClr val="3B3226"/>
                 </a:solidFill>
                 <a:latin typeface="Times New Roman"/>
                 <a:ea typeface="Noto Serif CJK SC"/>
@@ -8332,7 +9253,7 @@
       </p:sp>
       <p:sp>
         <p:nvSpPr>
-          <p:cNvPr id="15" name="TextBox 14"/>
+          <p:cNvPr id="16" name="TextBox 15"/>
           <p:cNvSpPr txBox="1"/>
           <p:nvPr/>
         </p:nvSpPr>
@@ -8361,7 +9282,7 @@
             <a:r>
               <a:rPr sz="1400" b="0" u="none">
                 <a:solidFill>
-                  <a:srgbClr val="A6322A"/>
+                  <a:srgbClr val="9F5647"/>
                 </a:solidFill>
                 <a:latin typeface="Times New Roman"/>
                 <a:ea typeface="Noto Serif CJK SC"/>
@@ -8371,7 +9292,7 @@
             <a:r>
               <a:rPr sz="1400" b="0" u="none">
                 <a:solidFill>
-                  <a:srgbClr val="23211E"/>
+                  <a:srgbClr val="2B2620"/>
                 </a:solidFill>
                 <a:latin typeface="Times New Roman"/>
                 <a:ea typeface="Noto Serif CJK SC"/>
@@ -8383,7 +9304,7 @@
       </p:sp>
       <p:sp>
         <p:nvSpPr>
-          <p:cNvPr id="16" name="Rectangle 15"/>
+          <p:cNvPr id="17" name="Rectangle 16"/>
           <p:cNvSpPr/>
           <p:nvPr/>
         </p:nvSpPr>
@@ -8396,7 +9317,7 @@
             <a:avLst/>
           </a:prstGeom>
           <a:solidFill>
-            <a:srgbClr val="A6322A"/>
+            <a:srgbClr val="9F5647"/>
           </a:solidFill>
           <a:ln>
             <a:noFill/>
@@ -8427,7 +9348,7 @@
       </p:sp>
       <p:sp>
         <p:nvSpPr>
-          <p:cNvPr id="17" name="Rounded Rectangle 16"/>
+          <p:cNvPr id="18" name="Rounded Rectangle 17"/>
           <p:cNvSpPr/>
           <p:nvPr/>
         </p:nvSpPr>
@@ -8442,7 +9363,7 @@
             </a:avLst>
           </a:prstGeom>
           <a:solidFill>
-            <a:srgbClr val="F3EDE3"/>
+            <a:srgbClr val="F7F2E8"/>
           </a:solidFill>
           <a:ln>
             <a:noFill/>
@@ -8473,7 +9394,7 @@
       </p:sp>
       <p:sp>
         <p:nvSpPr>
-          <p:cNvPr id="18" name="TextBox 17"/>
+          <p:cNvPr id="19" name="TextBox 18"/>
           <p:cNvSpPr txBox="1"/>
           <p:nvPr/>
         </p:nvSpPr>
@@ -8502,7 +9423,7 @@
             <a:r>
               <a:rPr sz="1500" b="1" u="none">
                 <a:solidFill>
-                  <a:srgbClr val="1C1B19"/>
+                  <a:srgbClr val="3B3226"/>
                 </a:solidFill>
                 <a:latin typeface="Times New Roman"/>
                 <a:ea typeface="Noto Serif CJK SC"/>
@@ -8514,7 +9435,7 @@
       </p:sp>
       <p:sp>
         <p:nvSpPr>
-          <p:cNvPr id="19" name="TextBox 18"/>
+          <p:cNvPr id="20" name="TextBox 19"/>
           <p:cNvSpPr txBox="1"/>
           <p:nvPr/>
         </p:nvSpPr>
@@ -8543,7 +9464,7 @@
             <a:r>
               <a:rPr sz="1400" b="0" u="none">
                 <a:solidFill>
-                  <a:srgbClr val="A6322A"/>
+                  <a:srgbClr val="9F5647"/>
                 </a:solidFill>
                 <a:latin typeface="Times New Roman"/>
                 <a:ea typeface="Noto Serif CJK SC"/>
@@ -8553,7 +9474,7 @@
             <a:r>
               <a:rPr sz="1400" b="0" u="none">
                 <a:solidFill>
-                  <a:srgbClr val="23211E"/>
+                  <a:srgbClr val="2B2620"/>
                 </a:solidFill>
                 <a:latin typeface="Times New Roman"/>
                 <a:ea typeface="Noto Serif CJK SC"/>
@@ -8565,7 +9486,7 @@
       </p:sp>
       <p:sp>
         <p:nvSpPr>
-          <p:cNvPr id="20" name="Rectangle 19"/>
+          <p:cNvPr id="21" name="Rectangle 20"/>
           <p:cNvSpPr/>
           <p:nvPr/>
         </p:nvSpPr>
@@ -8578,7 +9499,7 @@
             <a:avLst/>
           </a:prstGeom>
           <a:solidFill>
-            <a:srgbClr val="A6322A"/>
+            <a:srgbClr val="9F5647"/>
           </a:solidFill>
           <a:ln>
             <a:noFill/>
@@ -8609,7 +9530,7 @@
       </p:sp>
       <p:sp>
         <p:nvSpPr>
-          <p:cNvPr id="21" name="Rounded Rectangle 20"/>
+          <p:cNvPr id="22" name="Rounded Rectangle 21"/>
           <p:cNvSpPr/>
           <p:nvPr/>
         </p:nvSpPr>
@@ -8624,7 +9545,7 @@
             </a:avLst>
           </a:prstGeom>
           <a:solidFill>
-            <a:srgbClr val="F3EDE3"/>
+            <a:srgbClr val="F7F2E8"/>
           </a:solidFill>
           <a:ln>
             <a:noFill/>
@@ -8655,7 +9576,7 @@
       </p:sp>
       <p:sp>
         <p:nvSpPr>
-          <p:cNvPr id="22" name="TextBox 21"/>
+          <p:cNvPr id="23" name="TextBox 22"/>
           <p:cNvSpPr txBox="1"/>
           <p:nvPr/>
         </p:nvSpPr>
@@ -8684,7 +9605,7 @@
             <a:r>
               <a:rPr sz="1500" b="1" u="none">
                 <a:solidFill>
-                  <a:srgbClr val="1C1B19"/>
+                  <a:srgbClr val="3B3226"/>
                 </a:solidFill>
                 <a:latin typeface="Times New Roman"/>
                 <a:ea typeface="Noto Serif CJK SC"/>
@@ -8696,7 +9617,7 @@
       </p:sp>
       <p:sp>
         <p:nvSpPr>
-          <p:cNvPr id="23" name="TextBox 22"/>
+          <p:cNvPr id="24" name="TextBox 23"/>
           <p:cNvSpPr txBox="1"/>
           <p:nvPr/>
         </p:nvSpPr>
@@ -8725,7 +9646,7 @@
             <a:r>
               <a:rPr sz="1400" b="0" u="none">
                 <a:solidFill>
-                  <a:srgbClr val="A6322A"/>
+                  <a:srgbClr val="9F5647"/>
                 </a:solidFill>
                 <a:latin typeface="Times New Roman"/>
                 <a:ea typeface="Noto Serif CJK SC"/>
@@ -8735,7 +9656,7 @@
             <a:r>
               <a:rPr sz="1400" b="0" u="none">
                 <a:solidFill>
-                  <a:srgbClr val="23211E"/>
+                  <a:srgbClr val="2B2620"/>
                 </a:solidFill>
                 <a:latin typeface="Times New Roman"/>
                 <a:ea typeface="Noto Serif CJK SC"/>
@@ -8747,7 +9668,7 @@
       </p:sp>
       <p:sp>
         <p:nvSpPr>
-          <p:cNvPr id="24" name="Rectangle 23"/>
+          <p:cNvPr id="25" name="Rectangle 24"/>
           <p:cNvSpPr/>
           <p:nvPr/>
         </p:nvSpPr>
@@ -8760,7 +9681,7 @@
             <a:avLst/>
           </a:prstGeom>
           <a:solidFill>
-            <a:srgbClr val="A6322A"/>
+            <a:srgbClr val="9F5647"/>
           </a:solidFill>
           <a:ln>
             <a:noFill/>
@@ -8791,14 +9712,14 @@
       </p:sp>
       <p:sp>
         <p:nvSpPr>
-          <p:cNvPr id="25" name="TextBox 24"/>
+          <p:cNvPr id="26" name="TextBox 25"/>
           <p:cNvSpPr txBox="1"/>
           <p:nvPr/>
         </p:nvSpPr>
         <p:spPr>
           <a:xfrm>
             <a:off x="548640" y="6345936"/>
-            <a:ext cx="8595360" cy="274320"/>
+            <a:ext cx="7498079" cy="274320"/>
           </a:xfrm>
           <a:prstGeom prst="rect">
             <a:avLst/>
@@ -8832,7 +9753,7 @@
       </p:sp>
       <p:sp>
         <p:nvSpPr>
-          <p:cNvPr id="26" name="TextBox 25"/>
+          <p:cNvPr id="27" name="TextBox 26"/>
           <p:cNvSpPr txBox="1"/>
           <p:nvPr/>
         </p:nvSpPr>
@@ -8898,13 +9819,13 @@
         <p:spPr>
           <a:xfrm>
             <a:off x="0" y="0"/>
-            <a:ext cx="12191695" cy="822960"/>
+            <a:ext cx="12191695" cy="82296"/>
           </a:xfrm>
           <a:prstGeom prst="rect">
             <a:avLst/>
           </a:prstGeom>
           <a:solidFill>
-            <a:srgbClr val="1C1B19"/>
+            <a:srgbClr val="3B3226"/>
           </a:solidFill>
           <a:ln>
             <a:noFill/>
@@ -8935,58 +9856,14 @@
       </p:sp>
       <p:sp>
         <p:nvSpPr>
-          <p:cNvPr id="3" name="Rectangle 2"/>
-          <p:cNvSpPr/>
-          <p:nvPr/>
-        </p:nvSpPr>
-        <p:spPr>
-          <a:xfrm>
-            <a:off x="0" y="822960"/>
-            <a:ext cx="12191695" cy="45720"/>
-          </a:xfrm>
-          <a:prstGeom prst="rect">
-            <a:avLst/>
-          </a:prstGeom>
-          <a:solidFill>
-            <a:srgbClr val="A6322A"/>
-          </a:solidFill>
-          <a:ln>
-            <a:noFill/>
-          </a:ln>
-          <a:effectLst/>
-        </p:spPr>
-        <p:style>
-          <a:lnRef idx="1">
-            <a:schemeClr val="accent1"/>
-          </a:lnRef>
-          <a:fillRef idx="3">
-            <a:schemeClr val="accent1"/>
-          </a:fillRef>
-          <a:effectRef idx="2">
-            <a:schemeClr val="accent1"/>
-          </a:effectRef>
-          <a:fontRef idx="minor">
-            <a:schemeClr val="lt1"/>
-          </a:fontRef>
-        </p:style>
-        <p:txBody>
-          <a:bodyPr rtlCol="0" anchor="ctr"/>
-          <a:lstStyle/>
-          <a:p>
-            <a:pPr algn="ctr"/>
-          </a:p>
-        </p:txBody>
-      </p:sp>
-      <p:sp>
-        <p:nvSpPr>
-          <p:cNvPr id="4" name="TextBox 3"/>
+          <p:cNvPr id="3" name="TextBox 2"/>
           <p:cNvSpPr txBox="1"/>
           <p:nvPr/>
         </p:nvSpPr>
         <p:spPr>
           <a:xfrm>
-            <a:off x="548640" y="137160"/>
-            <a:ext cx="8442656" cy="548640"/>
+            <a:off x="548640" y="292608"/>
+            <a:ext cx="7985455" cy="566928"/>
           </a:xfrm>
           <a:prstGeom prst="rect">
             <a:avLst/>
@@ -9008,7 +9885,7 @@
             <a:r>
               <a:rPr sz="2600" b="1" u="none">
                 <a:solidFill>
-                  <a:srgbClr val="FFFFFF"/>
+                  <a:srgbClr val="3B3226"/>
                 </a:solidFill>
                 <a:latin typeface="Times New Roman"/>
                 <a:ea typeface="Noto Serif CJK SC"/>
@@ -9020,13 +9897,13 @@
       </p:sp>
       <p:sp>
         <p:nvSpPr>
-          <p:cNvPr id="5" name="Rounded Rectangle 4"/>
+          <p:cNvPr id="4" name="Rounded Rectangle 3"/>
           <p:cNvSpPr/>
           <p:nvPr/>
         </p:nvSpPr>
         <p:spPr>
           <a:xfrm>
-            <a:off x="10966399" y="219456"/>
+            <a:off x="10966399" y="384048"/>
             <a:ext cx="676656" cy="365760"/>
           </a:xfrm>
           <a:prstGeom prst="roundRect">
@@ -9035,7 +9912,7 @@
             </a:avLst>
           </a:prstGeom>
           <a:solidFill>
-            <a:srgbClr val="2E4A78"/>
+            <a:srgbClr val="C00000"/>
           </a:solidFill>
           <a:ln>
             <a:noFill/>
@@ -9066,13 +9943,13 @@
       </p:sp>
       <p:sp>
         <p:nvSpPr>
-          <p:cNvPr id="6" name="TextBox 5"/>
+          <p:cNvPr id="5" name="TextBox 4"/>
           <p:cNvSpPr txBox="1"/>
           <p:nvPr/>
         </p:nvSpPr>
         <p:spPr>
           <a:xfrm>
-            <a:off x="10966399" y="237744"/>
+            <a:off x="10966399" y="402336"/>
             <a:ext cx="676656" cy="329184"/>
           </a:xfrm>
           <a:prstGeom prst="rect">
@@ -9107,6 +9984,50 @@
       </p:sp>
       <p:sp>
         <p:nvSpPr>
+          <p:cNvPr id="6" name="Rectangle 5"/>
+          <p:cNvSpPr/>
+          <p:nvPr/>
+        </p:nvSpPr>
+        <p:spPr>
+          <a:xfrm>
+            <a:off x="548640" y="950976"/>
+            <a:ext cx="11094415" cy="9525"/>
+          </a:xfrm>
+          <a:prstGeom prst="rect">
+            <a:avLst/>
+          </a:prstGeom>
+          <a:solidFill>
+            <a:srgbClr val="D8DEE8"/>
+          </a:solidFill>
+          <a:ln>
+            <a:noFill/>
+          </a:ln>
+          <a:effectLst/>
+        </p:spPr>
+        <p:style>
+          <a:lnRef idx="1">
+            <a:schemeClr val="accent1"/>
+          </a:lnRef>
+          <a:fillRef idx="3">
+            <a:schemeClr val="accent1"/>
+          </a:fillRef>
+          <a:effectRef idx="2">
+            <a:schemeClr val="accent1"/>
+          </a:effectRef>
+          <a:fontRef idx="minor">
+            <a:schemeClr val="lt1"/>
+          </a:fontRef>
+        </p:style>
+        <p:txBody>
+          <a:bodyPr rtlCol="0" anchor="ctr"/>
+          <a:lstStyle/>
+          <a:p>
+            <a:pPr algn="ctr"/>
+          </a:p>
+        </p:txBody>
+      </p:sp>
+      <p:sp>
+        <p:nvSpPr>
           <p:cNvPr id="7" name="TextBox 6"/>
           <p:cNvSpPr txBox="1"/>
           <p:nvPr/>
@@ -9136,7 +10057,7 @@
             <a:r>
               <a:rPr sz="2200" b="0" u="none">
                 <a:solidFill>
-                  <a:srgbClr val="23211E"/>
+                  <a:srgbClr val="2B2620"/>
                 </a:solidFill>
                 <a:latin typeface="Times New Roman"/>
                 <a:ea typeface="Noto Serif CJK SC"/>
@@ -9177,7 +10098,7 @@
             <a:r>
               <a:rPr sz="1800" b="1" u="none">
                 <a:solidFill>
-                  <a:srgbClr val="A6322A"/>
+                  <a:srgbClr val="9F5647"/>
                 </a:solidFill>
                 <a:latin typeface="Times New Roman"/>
                 <a:ea typeface="Noto Serif CJK SC"/>
@@ -9187,7 +10108,7 @@
             <a:r>
               <a:rPr sz="1800" b="0" u="none">
                 <a:solidFill>
-                  <a:srgbClr val="23211E"/>
+                  <a:srgbClr val="2B2620"/>
                 </a:solidFill>
                 <a:latin typeface="Times New Roman"/>
                 <a:ea typeface="Noto Serif CJK SC"/>
@@ -9228,7 +10149,7 @@
             <a:r>
               <a:rPr sz="1800" b="1" u="none">
                 <a:solidFill>
-                  <a:srgbClr val="A6322A"/>
+                  <a:srgbClr val="9F5647"/>
                 </a:solidFill>
                 <a:latin typeface="Times New Roman"/>
                 <a:ea typeface="Noto Serif CJK SC"/>
@@ -9238,7 +10159,7 @@
             <a:r>
               <a:rPr sz="1800" b="0" u="none">
                 <a:solidFill>
-                  <a:srgbClr val="23211E"/>
+                  <a:srgbClr val="2B2620"/>
                 </a:solidFill>
                 <a:latin typeface="Times New Roman"/>
                 <a:ea typeface="Noto Serif CJK SC"/>
@@ -9279,7 +10200,7 @@
             <a:r>
               <a:rPr sz="1800" b="1" u="none">
                 <a:solidFill>
-                  <a:srgbClr val="A6322A"/>
+                  <a:srgbClr val="9F5647"/>
                 </a:solidFill>
                 <a:latin typeface="Times New Roman"/>
                 <a:ea typeface="Noto Serif CJK SC"/>
@@ -9289,7 +10210,7 @@
             <a:r>
               <a:rPr sz="1800" b="0" u="none">
                 <a:solidFill>
-                  <a:srgbClr val="23211E"/>
+                  <a:srgbClr val="2B2620"/>
                 </a:solidFill>
                 <a:latin typeface="Times New Roman"/>
                 <a:ea typeface="Noto Serif CJK SC"/>
@@ -9330,7 +10251,7 @@
             <a:r>
               <a:rPr sz="1800" b="1" u="none">
                 <a:solidFill>
-                  <a:srgbClr val="A6322A"/>
+                  <a:srgbClr val="9F5647"/>
                 </a:solidFill>
                 <a:latin typeface="Times New Roman"/>
                 <a:ea typeface="Noto Serif CJK SC"/>
@@ -9340,7 +10261,7 @@
             <a:r>
               <a:rPr sz="1800" b="0" u="none">
                 <a:solidFill>
-                  <a:srgbClr val="23211E"/>
+                  <a:srgbClr val="2B2620"/>
                 </a:solidFill>
                 <a:latin typeface="Times New Roman"/>
                 <a:ea typeface="Noto Serif CJK SC"/>
@@ -9365,7 +10286,7 @@
             <a:avLst/>
           </a:prstGeom>
           <a:solidFill>
-            <a:srgbClr val="A6322A"/>
+            <a:srgbClr val="9F5647"/>
           </a:solidFill>
           <a:ln>
             <a:noFill/>
@@ -9403,7 +10324,7 @@
         <p:spPr>
           <a:xfrm>
             <a:off x="548640" y="6345936"/>
-            <a:ext cx="8595360" cy="274320"/>
+            <a:ext cx="7498079" cy="274320"/>
           </a:xfrm>
           <a:prstGeom prst="rect">
             <a:avLst/>
